--- a/SHEIN_Data_Cleaning_Presentation.pptx
+++ b/SHEIN_Data_Cleaning_Presentation.pptx
@@ -130,7 +130,14 @@
   <c:date1904 val="0"/>
   <c:lang val="en-US"/>
   <c:roundedCorners val="1"/>
-  <c:style val="2"/>
+  <mc:AlternateContent xmlns:mc="http://schemas.openxmlformats.org/markup-compatibility/2006">
+    <mc:Choice xmlns:c14="http://schemas.microsoft.com/office/drawing/2007/8/2/chart" Requires="c14">
+      <c14:style val="102"/>
+    </mc:Choice>
+    <mc:Fallback>
+      <c:style val="2"/>
+    </mc:Fallback>
+  </mc:AlternateContent>
   <c:chart>
     <c:autoTitleDeleted val="1"/>
     <c:plotArea>
@@ -181,7 +188,7 @@
                     <a:latin typeface="Arial"/>
                   </a:defRPr>
                 </a:pPr>
-                <a:endParaRPr lang="en-US"/>
+                <a:endParaRPr lang="en-GY"/>
               </a:p>
             </c:txPr>
             <c:showLegendKey val="0"/>
@@ -203,40 +210,40 @@
               <c:strCache>
                 <c:ptCount val="14"/>
                 <c:pt idx="0">
+                  <c:v>us_clothing</c:v>
+                </c:pt>
+                <c:pt idx="1">
+                  <c:v>one_size</c:v>
+                </c:pt>
+                <c:pt idx="2">
+                  <c:v>plus</c:v>
+                </c:pt>
+                <c:pt idx="3">
                   <c:v>standard</c:v>
                 </c:pt>
-                <c:pt idx="1">
-                  <c:v>us_letter</c:v>
-                </c:pt>
-                <c:pt idx="2">
-                  <c:v>one_size</c:v>
-                </c:pt>
-                <c:pt idx="3">
+                <c:pt idx="4">
                   <c:v>shoe_intl</c:v>
                 </c:pt>
-                <c:pt idx="4">
-                  <c:v>plus</c:v>
-                </c:pt>
                 <c:pt idx="5">
-                  <c:v>eu_clothing</c:v>
+                  <c:v>missing</c:v>
                 </c:pt>
                 <c:pt idx="6">
                   <c:v>dimensions</c:v>
                 </c:pt>
                 <c:pt idx="7">
-                  <c:v>petite</c:v>
+                  <c:v>shoe_us</c:v>
                 </c:pt>
                 <c:pt idx="8">
-                  <c:v>shoe_us</c:v>
+                  <c:v>bra</c:v>
                 </c:pt>
                 <c:pt idx="9">
-                  <c:v>kids</c:v>
+                  <c:v>us_letter</c:v>
                 </c:pt>
                 <c:pt idx="10">
-                  <c:v>bra</c:v>
+                  <c:v>unknown</c:v>
                 </c:pt>
                 <c:pt idx="11">
-                  <c:v>tall</c:v>
+                  <c:v>kids</c:v>
                 </c:pt>
                 <c:pt idx="12">
                   <c:v>jeans</c:v>
@@ -254,53 +261,53 @@
                 <c:formatCode>General</c:formatCode>
                 <c:ptCount val="14"/>
                 <c:pt idx="0">
-                  <c:v>28000</c:v>
+                  <c:v>60668</c:v>
                 </c:pt>
                 <c:pt idx="1">
-                  <c:v>12000</c:v>
+                  <c:v>11787</c:v>
                 </c:pt>
                 <c:pt idx="2">
-                  <c:v>8500</c:v>
+                  <c:v>7315</c:v>
                 </c:pt>
                 <c:pt idx="3">
-                  <c:v>4200</c:v>
+                  <c:v>7055</c:v>
                 </c:pt>
                 <c:pt idx="4">
-                  <c:v>3800</c:v>
+                  <c:v>6247</c:v>
                 </c:pt>
                 <c:pt idx="5">
-                  <c:v>3200</c:v>
+                  <c:v>5494</c:v>
                 </c:pt>
                 <c:pt idx="6">
-                  <c:v>2100</c:v>
+                  <c:v>2250</c:v>
                 </c:pt>
                 <c:pt idx="7">
-                  <c:v>1800</c:v>
+                  <c:v>1252</c:v>
                 </c:pt>
                 <c:pt idx="8">
-                  <c:v>1500</c:v>
+                  <c:v>368</c:v>
                 </c:pt>
                 <c:pt idx="9">
-                  <c:v>900</c:v>
+                  <c:v>271</c:v>
                 </c:pt>
                 <c:pt idx="10">
-                  <c:v>700</c:v>
+                  <c:v>219</c:v>
                 </c:pt>
                 <c:pt idx="11">
-                  <c:v>500</c:v>
+                  <c:v>139</c:v>
                 </c:pt>
                 <c:pt idx="12">
-                  <c:v>400</c:v>
+                  <c:v>85</c:v>
                 </c:pt>
                 <c:pt idx="13">
-                  <c:v>200</c:v>
+                  <c:v>52</c:v>
                 </c:pt>
               </c:numCache>
             </c:numRef>
           </c:val>
           <c:extLst>
             <c:ext xmlns:c16="http://schemas.microsoft.com/office/drawing/2014/chart" uri="{C3380CC4-5D6E-409C-BE32-E72D297353CC}">
-              <c16:uniqueId val="{00000000-1E65-4CE9-AD28-51827C506963}"/>
+              <c16:uniqueId val="{00000000-C4CA-468C-A12E-7B22C4E0B00B}"/>
             </c:ext>
           </c:extLst>
         </c:ser>
@@ -11551,7 +11558,13 @@
       </p:sp>
       <p:graphicFrame>
         <p:nvGraphicFramePr>
-          <p:cNvPr id="5" name="Chart 0"/>
+          <p:cNvPr id="6" name="Chart 0">
+            <a:extLst>
+              <a:ext uri="{FF2B5EF4-FFF2-40B4-BE49-F238E27FC236}">
+                <a16:creationId xmlns:a16="http://schemas.microsoft.com/office/drawing/2014/main" id="{E7A83325-A40F-B61C-1739-2AA36204D855}"/>
+              </a:ext>
+            </a:extLst>
+          </p:cNvPr>
           <p:cNvGraphicFramePr/>
           <p:nvPr/>
         </p:nvGraphicFramePr>

--- a/SHEIN_Data_Cleaning_Presentation.pptx
+++ b/SHEIN_Data_Cleaning_Presentation.pptx
@@ -5,7 +5,7 @@
     <p:sldMasterId id="2147483648" r:id="rId1"/>
   </p:sldMasterIdLst>
   <p:notesMasterIdLst>
-    <p:notesMasterId r:id="rId16"/>
+    <p:notesMasterId r:id="rId17"/>
   </p:notesMasterIdLst>
   <p:sldIdLst>
     <p:sldId id="256" r:id="rId2"/>
@@ -14,14 +14,15 @@
     <p:sldId id="259" r:id="rId5"/>
     <p:sldId id="260" r:id="rId6"/>
     <p:sldId id="261" r:id="rId7"/>
-    <p:sldId id="262" r:id="rId8"/>
-    <p:sldId id="263" r:id="rId9"/>
-    <p:sldId id="264" r:id="rId10"/>
-    <p:sldId id="265" r:id="rId11"/>
-    <p:sldId id="266" r:id="rId12"/>
-    <p:sldId id="267" r:id="rId13"/>
-    <p:sldId id="268" r:id="rId14"/>
-    <p:sldId id="269" r:id="rId15"/>
+    <p:sldId id="270" r:id="rId8"/>
+    <p:sldId id="262" r:id="rId9"/>
+    <p:sldId id="263" r:id="rId10"/>
+    <p:sldId id="264" r:id="rId11"/>
+    <p:sldId id="265" r:id="rId12"/>
+    <p:sldId id="266" r:id="rId13"/>
+    <p:sldId id="267" r:id="rId14"/>
+    <p:sldId id="268" r:id="rId15"/>
+    <p:sldId id="269" r:id="rId16"/>
   </p:sldIdLst>
   <p:sldSz cx="9144000" cy="5143500" type="screen16x9"/>
   <p:notesSz cx="5143500" cy="9144000"/>
@@ -978,7 +979,7 @@
           <a:p>
             <a:fld id="{F7021451-1387-4CA6-816F-3879F97B5CBC}" type="slidenum">
               <a:rPr lang="en-US"/>
-              <a:t>10</a:t>
+              <a:t>11</a:t>
             </a:fld>
             <a:endParaRPr lang="en-US"/>
           </a:p>
@@ -1062,7 +1063,7 @@
           <a:p>
             <a:fld id="{F7021451-1387-4CA6-816F-3879F97B5CBC}" type="slidenum">
               <a:rPr lang="en-US"/>
-              <a:t>11</a:t>
+              <a:t>12</a:t>
             </a:fld>
             <a:endParaRPr lang="en-US"/>
           </a:p>
@@ -1146,7 +1147,7 @@
           <a:p>
             <a:fld id="{F7021451-1387-4CA6-816F-3879F97B5CBC}" type="slidenum">
               <a:rPr lang="en-US"/>
-              <a:t>12</a:t>
+              <a:t>13</a:t>
             </a:fld>
             <a:endParaRPr lang="en-US"/>
           </a:p>
@@ -1230,7 +1231,7 @@
           <a:p>
             <a:fld id="{F7021451-1387-4CA6-816F-3879F97B5CBC}" type="slidenum">
               <a:rPr lang="en-US"/>
-              <a:t>13</a:t>
+              <a:t>14</a:t>
             </a:fld>
             <a:endParaRPr lang="en-US"/>
           </a:p>
@@ -1314,7 +1315,7 @@
           <a:p>
             <a:fld id="{F7021451-1387-4CA6-816F-3879F97B5CBC}" type="slidenum">
               <a:rPr lang="en-US"/>
-              <a:t>14</a:t>
+              <a:t>15</a:t>
             </a:fld>
             <a:endParaRPr lang="en-US"/>
           </a:p>
@@ -1818,7 +1819,7 @@
           <a:p>
             <a:fld id="{F7021451-1387-4CA6-816F-3879F97B5CBC}" type="slidenum">
               <a:rPr lang="en-US"/>
-              <a:t>7</a:t>
+              <a:t>8</a:t>
             </a:fld>
             <a:endParaRPr lang="en-US"/>
           </a:p>
@@ -1902,7 +1903,7 @@
           <a:p>
             <a:fld id="{F7021451-1387-4CA6-816F-3879F97B5CBC}" type="slidenum">
               <a:rPr lang="en-US"/>
-              <a:t>8</a:t>
+              <a:t>9</a:t>
             </a:fld>
             <a:endParaRPr lang="en-US"/>
           </a:p>
@@ -1986,7 +1987,7 @@
           <a:p>
             <a:fld id="{F7021451-1387-4CA6-816F-3879F97B5CBC}" type="slidenum">
               <a:rPr lang="en-US"/>
-              <a:t>9</a:t>
+              <a:t>10</a:t>
             </a:fld>
             <a:endParaRPr lang="en-US"/>
           </a:p>
@@ -2614,6 +2615,913 @@
 
 <file path=ppt/slides/slide10.xml><?xml version="1.0" encoding="utf-8"?>
 <p:sld xmlns:a="http://schemas.openxmlformats.org/drawingml/2006/main" xmlns:r="http://schemas.openxmlformats.org/officeDocument/2006/relationships" xmlns:p="http://schemas.openxmlformats.org/presentationml/2006/main">
+  <p:cSld name="Slide 9">
+    <p:bg>
+      <p:bgPr>
+        <a:solidFill>
+          <a:srgbClr val="F0F4F8"/>
+        </a:solidFill>
+        <a:effectLst/>
+      </p:bgPr>
+    </p:bg>
+    <p:spTree>
+      <p:nvGrpSpPr>
+        <p:cNvPr id="1" name=""/>
+        <p:cNvGrpSpPr/>
+        <p:nvPr/>
+      </p:nvGrpSpPr>
+      <p:grpSpPr>
+        <a:xfrm>
+          <a:off x="0" y="0"/>
+          <a:ext cx="0" cy="0"/>
+          <a:chOff x="0" y="0"/>
+          <a:chExt cx="0" cy="0"/>
+        </a:xfrm>
+      </p:grpSpPr>
+      <p:sp>
+        <p:nvSpPr>
+          <p:cNvPr id="2" name="Shape 0"/>
+          <p:cNvSpPr/>
+          <p:nvPr/>
+        </p:nvSpPr>
+        <p:spPr>
+          <a:xfrm>
+            <a:off x="457200" y="320040"/>
+            <a:ext cx="457200" cy="457200"/>
+          </a:xfrm>
+          <a:prstGeom prst="ellipse">
+            <a:avLst/>
+          </a:prstGeom>
+          <a:solidFill>
+            <a:srgbClr val="065A82"/>
+          </a:solidFill>
+          <a:ln/>
+        </p:spPr>
+        <p:txBody>
+          <a:bodyPr/>
+          <a:lstStyle/>
+          <a:p>
+            <a:endParaRPr lang="en-US"/>
+          </a:p>
+        </p:txBody>
+      </p:sp>
+      <p:pic>
+        <p:nvPicPr>
+          <p:cNvPr id="3" name="Image 0" descr="preencoded.png"/>
+          <p:cNvPicPr>
+            <a:picLocks noChangeAspect="1"/>
+          </p:cNvPicPr>
+          <p:nvPr/>
+        </p:nvPicPr>
+        <p:blipFill>
+          <a:blip r:embed="rId3"/>
+          <a:stretch>
+            <a:fillRect/>
+          </a:stretch>
+        </p:blipFill>
+        <p:spPr>
+          <a:xfrm>
+            <a:off x="557784" y="420624"/>
+            <a:ext cx="256032" cy="256032"/>
+          </a:xfrm>
+          <a:prstGeom prst="rect">
+            <a:avLst/>
+          </a:prstGeom>
+        </p:spPr>
+      </p:pic>
+      <p:sp>
+        <p:nvSpPr>
+          <p:cNvPr id="4" name="Text 1"/>
+          <p:cNvSpPr/>
+          <p:nvPr/>
+        </p:nvSpPr>
+        <p:spPr>
+          <a:xfrm>
+            <a:off x="1051560" y="320040"/>
+            <a:ext cx="5486400" cy="457200"/>
+          </a:xfrm>
+          <a:prstGeom prst="rect">
+            <a:avLst/>
+          </a:prstGeom>
+          <a:noFill/>
+          <a:ln/>
+        </p:spPr>
+        <p:txBody>
+          <a:bodyPr wrap="square" lIns="0" tIns="0" rIns="0" bIns="0" rtlCol="0" anchor="ctr"/>
+          <a:lstStyle/>
+          <a:p>
+            <a:pPr marL="0" indent="0">
+              <a:buNone/>
+            </a:pPr>
+            <a:r>
+              <a:rPr lang="en-US" sz="3200" b="1" dirty="0">
+                <a:solidFill>
+                  <a:srgbClr val="21295C"/>
+                </a:solidFill>
+                <a:latin typeface="Georgia" pitchFamily="34" charset="0"/>
+                <a:ea typeface="Georgia" pitchFamily="34" charset="-122"/>
+                <a:cs typeface="Georgia" pitchFamily="34" charset="-120"/>
+              </a:rPr>
+              <a:t>Outputs</a:t>
+            </a:r>
+            <a:endParaRPr lang="en-US" sz="3200" dirty="0"/>
+          </a:p>
+        </p:txBody>
+      </p:sp>
+      <p:sp>
+        <p:nvSpPr>
+          <p:cNvPr id="5" name="Shape 2"/>
+          <p:cNvSpPr/>
+          <p:nvPr/>
+        </p:nvSpPr>
+        <p:spPr>
+          <a:xfrm>
+            <a:off x="457200" y="1005840"/>
+            <a:ext cx="8229600" cy="457200"/>
+          </a:xfrm>
+          <a:prstGeom prst="rect">
+            <a:avLst/>
+          </a:prstGeom>
+          <a:solidFill>
+            <a:srgbClr val="FFFFFF"/>
+          </a:solidFill>
+          <a:ln/>
+          <a:effectLst>
+            <a:outerShdw blurRad="76200" dist="25400" dir="8100000" algn="bl" rotWithShape="0">
+              <a:srgbClr val="000000">
+                <a:alpha val="12000"/>
+              </a:srgbClr>
+            </a:outerShdw>
+          </a:effectLst>
+        </p:spPr>
+        <p:txBody>
+          <a:bodyPr/>
+          <a:lstStyle/>
+          <a:p>
+            <a:endParaRPr lang="en-US"/>
+          </a:p>
+        </p:txBody>
+      </p:sp>
+      <p:sp>
+        <p:nvSpPr>
+          <p:cNvPr id="6" name="Text 3"/>
+          <p:cNvSpPr/>
+          <p:nvPr/>
+        </p:nvSpPr>
+        <p:spPr>
+          <a:xfrm>
+            <a:off x="640080" y="1051560"/>
+            <a:ext cx="3200400" cy="365760"/>
+          </a:xfrm>
+          <a:prstGeom prst="rect">
+            <a:avLst/>
+          </a:prstGeom>
+          <a:noFill/>
+          <a:ln/>
+        </p:spPr>
+        <p:txBody>
+          <a:bodyPr wrap="square" lIns="0" tIns="0" rIns="0" bIns="0" rtlCol="0" anchor="ctr"/>
+          <a:lstStyle/>
+          <a:p>
+            <a:pPr marL="0" indent="0">
+              <a:buNone/>
+            </a:pPr>
+            <a:r>
+              <a:rPr lang="en-US" sz="1200" b="1" dirty="0">
+                <a:solidFill>
+                  <a:srgbClr val="0EA5E9"/>
+                </a:solidFill>
+                <a:latin typeface="Consolas" pitchFamily="34" charset="0"/>
+                <a:ea typeface="Consolas" pitchFamily="34" charset="-122"/>
+                <a:cs typeface="Consolas" pitchFamily="34" charset="-120"/>
+              </a:rPr>
+              <a:t>shein_cleaned.csv</a:t>
+            </a:r>
+            <a:endParaRPr lang="en-US" sz="1200" dirty="0"/>
+          </a:p>
+        </p:txBody>
+      </p:sp>
+      <p:sp>
+        <p:nvSpPr>
+          <p:cNvPr id="7" name="Text 4"/>
+          <p:cNvSpPr/>
+          <p:nvPr/>
+        </p:nvSpPr>
+        <p:spPr>
+          <a:xfrm>
+            <a:off x="3931920" y="1051560"/>
+            <a:ext cx="4572000" cy="365760"/>
+          </a:xfrm>
+          <a:prstGeom prst="rect">
+            <a:avLst/>
+          </a:prstGeom>
+          <a:noFill/>
+          <a:ln/>
+        </p:spPr>
+        <p:txBody>
+          <a:bodyPr wrap="square" lIns="0" tIns="0" rIns="0" bIns="0" rtlCol="0" anchor="ctr"/>
+          <a:lstStyle/>
+          <a:p>
+            <a:pPr marL="0" indent="0">
+              <a:buNone/>
+            </a:pPr>
+            <a:r>
+              <a:rPr lang="en-US" sz="1300" dirty="0">
+                <a:solidFill>
+                  <a:srgbClr val="21295C"/>
+                </a:solidFill>
+                <a:latin typeface="Calibri" pitchFamily="34" charset="0"/>
+                <a:ea typeface="Calibri" pitchFamily="34" charset="-122"/>
+                <a:cs typeface="Calibri" pitchFamily="34" charset="-120"/>
+              </a:rPr>
+              <a:t>Primary cleaned dataset — all columns, one row per product</a:t>
+            </a:r>
+            <a:endParaRPr lang="en-US" sz="1300" dirty="0"/>
+          </a:p>
+        </p:txBody>
+      </p:sp>
+      <p:sp>
+        <p:nvSpPr>
+          <p:cNvPr id="8" name="Shape 5"/>
+          <p:cNvSpPr/>
+          <p:nvPr/>
+        </p:nvSpPr>
+        <p:spPr>
+          <a:xfrm>
+            <a:off x="457200" y="1554480"/>
+            <a:ext cx="8229600" cy="457200"/>
+          </a:xfrm>
+          <a:prstGeom prst="rect">
+            <a:avLst/>
+          </a:prstGeom>
+          <a:solidFill>
+            <a:srgbClr val="FFFFFF"/>
+          </a:solidFill>
+          <a:ln/>
+          <a:effectLst>
+            <a:outerShdw blurRad="76200" dist="25400" dir="8100000" algn="bl" rotWithShape="0">
+              <a:srgbClr val="000000">
+                <a:alpha val="12000"/>
+              </a:srgbClr>
+            </a:outerShdw>
+          </a:effectLst>
+        </p:spPr>
+        <p:txBody>
+          <a:bodyPr/>
+          <a:lstStyle/>
+          <a:p>
+            <a:endParaRPr lang="en-US"/>
+          </a:p>
+        </p:txBody>
+      </p:sp>
+      <p:sp>
+        <p:nvSpPr>
+          <p:cNvPr id="9" name="Text 6"/>
+          <p:cNvSpPr/>
+          <p:nvPr/>
+        </p:nvSpPr>
+        <p:spPr>
+          <a:xfrm>
+            <a:off x="640080" y="1600200"/>
+            <a:ext cx="3200400" cy="365760"/>
+          </a:xfrm>
+          <a:prstGeom prst="rect">
+            <a:avLst/>
+          </a:prstGeom>
+          <a:noFill/>
+          <a:ln/>
+        </p:spPr>
+        <p:txBody>
+          <a:bodyPr wrap="square" lIns="0" tIns="0" rIns="0" bIns="0" rtlCol="0" anchor="ctr"/>
+          <a:lstStyle/>
+          <a:p>
+            <a:pPr marL="0" indent="0">
+              <a:buNone/>
+            </a:pPr>
+            <a:r>
+              <a:rPr lang="en-US" sz="1200" b="1" dirty="0">
+                <a:solidFill>
+                  <a:srgbClr val="0EA5E9"/>
+                </a:solidFill>
+                <a:latin typeface="Consolas" pitchFamily="34" charset="0"/>
+                <a:ea typeface="Consolas" pitchFamily="34" charset="-122"/>
+                <a:cs typeface="Consolas" pitchFamily="34" charset="-120"/>
+              </a:rPr>
+              <a:t>shein_cleaned.sav</a:t>
+            </a:r>
+            <a:endParaRPr lang="en-US" sz="1200" dirty="0"/>
+          </a:p>
+        </p:txBody>
+      </p:sp>
+      <p:sp>
+        <p:nvSpPr>
+          <p:cNvPr id="10" name="Text 7"/>
+          <p:cNvSpPr/>
+          <p:nvPr/>
+        </p:nvSpPr>
+        <p:spPr>
+          <a:xfrm>
+            <a:off x="3931920" y="1600200"/>
+            <a:ext cx="4572000" cy="365760"/>
+          </a:xfrm>
+          <a:prstGeom prst="rect">
+            <a:avLst/>
+          </a:prstGeom>
+          <a:noFill/>
+          <a:ln/>
+        </p:spPr>
+        <p:txBody>
+          <a:bodyPr wrap="square" lIns="0" tIns="0" rIns="0" bIns="0" rtlCol="0" anchor="ctr"/>
+          <a:lstStyle/>
+          <a:p>
+            <a:pPr marL="0" indent="0">
+              <a:buNone/>
+            </a:pPr>
+            <a:r>
+              <a:rPr lang="en-US" sz="1300" dirty="0">
+                <a:solidFill>
+                  <a:srgbClr val="21295C"/>
+                </a:solidFill>
+                <a:latin typeface="Calibri" pitchFamily="34" charset="0"/>
+                <a:ea typeface="Calibri" pitchFamily="34" charset="-122"/>
+                <a:cs typeface="Calibri" pitchFamily="34" charset="-120"/>
+              </a:rPr>
+              <a:t>SPSS format for statistical software users</a:t>
+            </a:r>
+            <a:endParaRPr lang="en-US" sz="1300" dirty="0"/>
+          </a:p>
+        </p:txBody>
+      </p:sp>
+      <p:sp>
+        <p:nvSpPr>
+          <p:cNvPr id="11" name="Shape 8"/>
+          <p:cNvSpPr/>
+          <p:nvPr/>
+        </p:nvSpPr>
+        <p:spPr>
+          <a:xfrm>
+            <a:off x="457200" y="2103120"/>
+            <a:ext cx="8229600" cy="457200"/>
+          </a:xfrm>
+          <a:prstGeom prst="rect">
+            <a:avLst/>
+          </a:prstGeom>
+          <a:solidFill>
+            <a:srgbClr val="FFFFFF"/>
+          </a:solidFill>
+          <a:ln/>
+          <a:effectLst>
+            <a:outerShdw blurRad="76200" dist="25400" dir="8100000" algn="bl" rotWithShape="0">
+              <a:srgbClr val="000000">
+                <a:alpha val="12000"/>
+              </a:srgbClr>
+            </a:outerShdw>
+          </a:effectLst>
+        </p:spPr>
+        <p:txBody>
+          <a:bodyPr/>
+          <a:lstStyle/>
+          <a:p>
+            <a:endParaRPr lang="en-US"/>
+          </a:p>
+        </p:txBody>
+      </p:sp>
+      <p:sp>
+        <p:nvSpPr>
+          <p:cNvPr id="12" name="Text 9"/>
+          <p:cNvSpPr/>
+          <p:nvPr/>
+        </p:nvSpPr>
+        <p:spPr>
+          <a:xfrm>
+            <a:off x="640080" y="2148840"/>
+            <a:ext cx="3200400" cy="365760"/>
+          </a:xfrm>
+          <a:prstGeom prst="rect">
+            <a:avLst/>
+          </a:prstGeom>
+          <a:noFill/>
+          <a:ln/>
+        </p:spPr>
+        <p:txBody>
+          <a:bodyPr wrap="square" lIns="0" tIns="0" rIns="0" bIns="0" rtlCol="0" anchor="ctr"/>
+          <a:lstStyle/>
+          <a:p>
+            <a:pPr marL="0" indent="0">
+              <a:buNone/>
+            </a:pPr>
+            <a:r>
+              <a:rPr lang="en-US" sz="1200" b="1" dirty="0">
+                <a:solidFill>
+                  <a:srgbClr val="0EA5E9"/>
+                </a:solidFill>
+                <a:latin typeface="Consolas" pitchFamily="34" charset="0"/>
+                <a:ea typeface="Consolas" pitchFamily="34" charset="-122"/>
+                <a:cs typeface="Consolas" pitchFamily="34" charset="-120"/>
+              </a:rPr>
+              <a:t>shein_cleaned.dta</a:t>
+            </a:r>
+            <a:endParaRPr lang="en-US" sz="1200" dirty="0"/>
+          </a:p>
+        </p:txBody>
+      </p:sp>
+      <p:sp>
+        <p:nvSpPr>
+          <p:cNvPr id="13" name="Text 10"/>
+          <p:cNvSpPr/>
+          <p:nvPr/>
+        </p:nvSpPr>
+        <p:spPr>
+          <a:xfrm>
+            <a:off x="3931920" y="2148840"/>
+            <a:ext cx="4572000" cy="365760"/>
+          </a:xfrm>
+          <a:prstGeom prst="rect">
+            <a:avLst/>
+          </a:prstGeom>
+          <a:noFill/>
+          <a:ln/>
+        </p:spPr>
+        <p:txBody>
+          <a:bodyPr wrap="square" lIns="0" tIns="0" rIns="0" bIns="0" rtlCol="0" anchor="ctr"/>
+          <a:lstStyle/>
+          <a:p>
+            <a:pPr marL="0" indent="0">
+              <a:buNone/>
+            </a:pPr>
+            <a:r>
+              <a:rPr lang="en-US" sz="1300" dirty="0">
+                <a:solidFill>
+                  <a:srgbClr val="21295C"/>
+                </a:solidFill>
+                <a:latin typeface="Calibri" pitchFamily="34" charset="0"/>
+                <a:ea typeface="Calibri" pitchFamily="34" charset="-122"/>
+                <a:cs typeface="Calibri" pitchFamily="34" charset="-120"/>
+              </a:rPr>
+              <a:t>Stata format for econometric workflows</a:t>
+            </a:r>
+            <a:endParaRPr lang="en-US" sz="1300" dirty="0"/>
+          </a:p>
+        </p:txBody>
+      </p:sp>
+      <p:sp>
+        <p:nvSpPr>
+          <p:cNvPr id="14" name="Shape 11"/>
+          <p:cNvSpPr/>
+          <p:nvPr/>
+        </p:nvSpPr>
+        <p:spPr>
+          <a:xfrm>
+            <a:off x="457200" y="2651760"/>
+            <a:ext cx="8229600" cy="457200"/>
+          </a:xfrm>
+          <a:prstGeom prst="rect">
+            <a:avLst/>
+          </a:prstGeom>
+          <a:solidFill>
+            <a:srgbClr val="FFFFFF"/>
+          </a:solidFill>
+          <a:ln/>
+          <a:effectLst>
+            <a:outerShdw blurRad="76200" dist="25400" dir="8100000" algn="bl" rotWithShape="0">
+              <a:srgbClr val="000000">
+                <a:alpha val="12000"/>
+              </a:srgbClr>
+            </a:outerShdw>
+          </a:effectLst>
+        </p:spPr>
+        <p:txBody>
+          <a:bodyPr/>
+          <a:lstStyle/>
+          <a:p>
+            <a:endParaRPr lang="en-US"/>
+          </a:p>
+        </p:txBody>
+      </p:sp>
+      <p:sp>
+        <p:nvSpPr>
+          <p:cNvPr id="15" name="Text 12"/>
+          <p:cNvSpPr/>
+          <p:nvPr/>
+        </p:nvSpPr>
+        <p:spPr>
+          <a:xfrm>
+            <a:off x="640080" y="2697480"/>
+            <a:ext cx="3200400" cy="365760"/>
+          </a:xfrm>
+          <a:prstGeom prst="rect">
+            <a:avLst/>
+          </a:prstGeom>
+          <a:noFill/>
+          <a:ln/>
+        </p:spPr>
+        <p:txBody>
+          <a:bodyPr wrap="square" lIns="0" tIns="0" rIns="0" bIns="0" rtlCol="0" anchor="ctr"/>
+          <a:lstStyle/>
+          <a:p>
+            <a:pPr marL="0" indent="0">
+              <a:buNone/>
+            </a:pPr>
+            <a:r>
+              <a:rPr lang="en-US" sz="1200" b="1" dirty="0">
+                <a:solidFill>
+                  <a:srgbClr val="0EA5E9"/>
+                </a:solidFill>
+                <a:latin typeface="Consolas" pitchFamily="34" charset="0"/>
+                <a:ea typeface="Consolas" pitchFamily="34" charset="-122"/>
+                <a:cs typeface="Consolas" pitchFamily="34" charset="-120"/>
+              </a:rPr>
+              <a:t>shein_cleaned.xlsx</a:t>
+            </a:r>
+            <a:endParaRPr lang="en-US" sz="1200" dirty="0"/>
+          </a:p>
+        </p:txBody>
+      </p:sp>
+      <p:sp>
+        <p:nvSpPr>
+          <p:cNvPr id="16" name="Text 13"/>
+          <p:cNvSpPr/>
+          <p:nvPr/>
+        </p:nvSpPr>
+        <p:spPr>
+          <a:xfrm>
+            <a:off x="3931920" y="2697480"/>
+            <a:ext cx="4572000" cy="365760"/>
+          </a:xfrm>
+          <a:prstGeom prst="rect">
+            <a:avLst/>
+          </a:prstGeom>
+          <a:noFill/>
+          <a:ln/>
+        </p:spPr>
+        <p:txBody>
+          <a:bodyPr wrap="square" lIns="0" tIns="0" rIns="0" bIns="0" rtlCol="0" anchor="ctr"/>
+          <a:lstStyle/>
+          <a:p>
+            <a:pPr marL="0" indent="0">
+              <a:buNone/>
+            </a:pPr>
+            <a:r>
+              <a:rPr lang="en-US" sz="1300" dirty="0">
+                <a:solidFill>
+                  <a:srgbClr val="21295C"/>
+                </a:solidFill>
+                <a:latin typeface="Calibri" pitchFamily="34" charset="0"/>
+                <a:ea typeface="Calibri" pitchFamily="34" charset="-122"/>
+                <a:cs typeface="Calibri" pitchFamily="34" charset="-120"/>
+              </a:rPr>
+              <a:t>Excel workbook for non-technical stakeholders</a:t>
+            </a:r>
+            <a:endParaRPr lang="en-US" sz="1300" dirty="0"/>
+          </a:p>
+        </p:txBody>
+      </p:sp>
+      <p:sp>
+        <p:nvSpPr>
+          <p:cNvPr id="17" name="Shape 14"/>
+          <p:cNvSpPr/>
+          <p:nvPr/>
+        </p:nvSpPr>
+        <p:spPr>
+          <a:xfrm>
+            <a:off x="457200" y="3200400"/>
+            <a:ext cx="8229600" cy="457200"/>
+          </a:xfrm>
+          <a:prstGeom prst="rect">
+            <a:avLst/>
+          </a:prstGeom>
+          <a:solidFill>
+            <a:srgbClr val="FFFFFF"/>
+          </a:solidFill>
+          <a:ln/>
+          <a:effectLst>
+            <a:outerShdw blurRad="76200" dist="25400" dir="8100000" algn="bl" rotWithShape="0">
+              <a:srgbClr val="000000">
+                <a:alpha val="12000"/>
+              </a:srgbClr>
+            </a:outerShdw>
+          </a:effectLst>
+        </p:spPr>
+        <p:txBody>
+          <a:bodyPr/>
+          <a:lstStyle/>
+          <a:p>
+            <a:endParaRPr lang="en-US"/>
+          </a:p>
+        </p:txBody>
+      </p:sp>
+      <p:sp>
+        <p:nvSpPr>
+          <p:cNvPr id="18" name="Text 15"/>
+          <p:cNvSpPr/>
+          <p:nvPr/>
+        </p:nvSpPr>
+        <p:spPr>
+          <a:xfrm>
+            <a:off x="640080" y="3246120"/>
+            <a:ext cx="3200400" cy="365760"/>
+          </a:xfrm>
+          <a:prstGeom prst="rect">
+            <a:avLst/>
+          </a:prstGeom>
+          <a:noFill/>
+          <a:ln/>
+        </p:spPr>
+        <p:txBody>
+          <a:bodyPr wrap="square" lIns="0" tIns="0" rIns="0" bIns="0" rtlCol="0" anchor="ctr"/>
+          <a:lstStyle/>
+          <a:p>
+            <a:pPr marL="0" indent="0">
+              <a:buNone/>
+            </a:pPr>
+            <a:r>
+              <a:rPr lang="en-US" sz="1200" b="1" dirty="0">
+                <a:solidFill>
+                  <a:srgbClr val="0EA5E9"/>
+                </a:solidFill>
+                <a:latin typeface="Consolas" pitchFamily="34" charset="0"/>
+                <a:ea typeface="Consolas" pitchFamily="34" charset="-122"/>
+                <a:cs typeface="Consolas" pitchFamily="34" charset="-120"/>
+              </a:rPr>
+              <a:t>shein_cleaned.rds</a:t>
+            </a:r>
+            <a:endParaRPr lang="en-US" sz="1200" dirty="0"/>
+          </a:p>
+        </p:txBody>
+      </p:sp>
+      <p:sp>
+        <p:nvSpPr>
+          <p:cNvPr id="19" name="Text 16"/>
+          <p:cNvSpPr/>
+          <p:nvPr/>
+        </p:nvSpPr>
+        <p:spPr>
+          <a:xfrm>
+            <a:off x="3931920" y="3246120"/>
+            <a:ext cx="4572000" cy="365760"/>
+          </a:xfrm>
+          <a:prstGeom prst="rect">
+            <a:avLst/>
+          </a:prstGeom>
+          <a:noFill/>
+          <a:ln/>
+        </p:spPr>
+        <p:txBody>
+          <a:bodyPr wrap="square" lIns="0" tIns="0" rIns="0" bIns="0" rtlCol="0" anchor="ctr"/>
+          <a:lstStyle/>
+          <a:p>
+            <a:pPr marL="0" indent="0">
+              <a:buNone/>
+            </a:pPr>
+            <a:r>
+              <a:rPr lang="en-US" sz="1300" dirty="0">
+                <a:solidFill>
+                  <a:srgbClr val="21295C"/>
+                </a:solidFill>
+                <a:latin typeface="Calibri" pitchFamily="34" charset="0"/>
+                <a:ea typeface="Calibri" pitchFamily="34" charset="-122"/>
+                <a:cs typeface="Calibri" pitchFamily="34" charset="-120"/>
+              </a:rPr>
+              <a:t>Native R format preserving data types and factors</a:t>
+            </a:r>
+            <a:endParaRPr lang="en-US" sz="1300" dirty="0"/>
+          </a:p>
+        </p:txBody>
+      </p:sp>
+      <p:sp>
+        <p:nvSpPr>
+          <p:cNvPr id="20" name="Shape 17"/>
+          <p:cNvSpPr/>
+          <p:nvPr/>
+        </p:nvSpPr>
+        <p:spPr>
+          <a:xfrm>
+            <a:off x="457200" y="3749040"/>
+            <a:ext cx="8229600" cy="457200"/>
+          </a:xfrm>
+          <a:prstGeom prst="rect">
+            <a:avLst/>
+          </a:prstGeom>
+          <a:solidFill>
+            <a:srgbClr val="FFFFFF"/>
+          </a:solidFill>
+          <a:ln/>
+          <a:effectLst>
+            <a:outerShdw blurRad="76200" dist="25400" dir="8100000" algn="bl" rotWithShape="0">
+              <a:srgbClr val="000000">
+                <a:alpha val="12000"/>
+              </a:srgbClr>
+            </a:outerShdw>
+          </a:effectLst>
+        </p:spPr>
+        <p:txBody>
+          <a:bodyPr/>
+          <a:lstStyle/>
+          <a:p>
+            <a:endParaRPr lang="en-US"/>
+          </a:p>
+        </p:txBody>
+      </p:sp>
+      <p:sp>
+        <p:nvSpPr>
+          <p:cNvPr id="21" name="Text 18"/>
+          <p:cNvSpPr/>
+          <p:nvPr/>
+        </p:nvSpPr>
+        <p:spPr>
+          <a:xfrm>
+            <a:off x="640080" y="3794760"/>
+            <a:ext cx="3200400" cy="365760"/>
+          </a:xfrm>
+          <a:prstGeom prst="rect">
+            <a:avLst/>
+          </a:prstGeom>
+          <a:noFill/>
+          <a:ln/>
+        </p:spPr>
+        <p:txBody>
+          <a:bodyPr wrap="square" lIns="0" tIns="0" rIns="0" bIns="0" rtlCol="0" anchor="ctr"/>
+          <a:lstStyle/>
+          <a:p>
+            <a:pPr marL="0" indent="0">
+              <a:buNone/>
+            </a:pPr>
+            <a:r>
+              <a:rPr lang="en-US" sz="1200" b="1" dirty="0">
+                <a:solidFill>
+                  <a:srgbClr val="0EA5E9"/>
+                </a:solidFill>
+                <a:latin typeface="Consolas" pitchFamily="34" charset="0"/>
+                <a:ea typeface="Consolas" pitchFamily="34" charset="-122"/>
+                <a:cs typeface="Consolas" pitchFamily="34" charset="-120"/>
+              </a:rPr>
+              <a:t>shein_data_quality_report.docx</a:t>
+            </a:r>
+            <a:endParaRPr lang="en-US" sz="1200" dirty="0"/>
+          </a:p>
+        </p:txBody>
+      </p:sp>
+      <p:sp>
+        <p:nvSpPr>
+          <p:cNvPr id="22" name="Text 19"/>
+          <p:cNvSpPr/>
+          <p:nvPr/>
+        </p:nvSpPr>
+        <p:spPr>
+          <a:xfrm>
+            <a:off x="3931920" y="3794760"/>
+            <a:ext cx="4572000" cy="365760"/>
+          </a:xfrm>
+          <a:prstGeom prst="rect">
+            <a:avLst/>
+          </a:prstGeom>
+          <a:noFill/>
+          <a:ln/>
+        </p:spPr>
+        <p:txBody>
+          <a:bodyPr wrap="square" lIns="0" tIns="0" rIns="0" bIns="0" rtlCol="0" anchor="ctr"/>
+          <a:lstStyle/>
+          <a:p>
+            <a:pPr marL="0" indent="0">
+              <a:buNone/>
+            </a:pPr>
+            <a:r>
+              <a:rPr lang="en-US" sz="1300" dirty="0">
+                <a:solidFill>
+                  <a:srgbClr val="21295C"/>
+                </a:solidFill>
+                <a:latin typeface="Calibri" pitchFamily="34" charset="0"/>
+                <a:ea typeface="Calibri" pitchFamily="34" charset="-122"/>
+                <a:cs typeface="Calibri" pitchFamily="34" charset="-120"/>
+              </a:rPr>
+              <a:t>Rendered Word report documenting all decisions</a:t>
+            </a:r>
+            <a:endParaRPr lang="en-US" sz="1300" dirty="0"/>
+          </a:p>
+        </p:txBody>
+      </p:sp>
+      <p:sp>
+        <p:nvSpPr>
+          <p:cNvPr id="23" name="Shape 20"/>
+          <p:cNvSpPr/>
+          <p:nvPr/>
+        </p:nvSpPr>
+        <p:spPr>
+          <a:xfrm>
+            <a:off x="457200" y="4297680"/>
+            <a:ext cx="8229600" cy="457200"/>
+          </a:xfrm>
+          <a:prstGeom prst="rect">
+            <a:avLst/>
+          </a:prstGeom>
+          <a:solidFill>
+            <a:srgbClr val="FFFFFF"/>
+          </a:solidFill>
+          <a:ln/>
+          <a:effectLst>
+            <a:outerShdw blurRad="76200" dist="25400" dir="8100000" algn="bl" rotWithShape="0">
+              <a:srgbClr val="000000">
+                <a:alpha val="12000"/>
+              </a:srgbClr>
+            </a:outerShdw>
+          </a:effectLst>
+        </p:spPr>
+        <p:txBody>
+          <a:bodyPr/>
+          <a:lstStyle/>
+          <a:p>
+            <a:endParaRPr lang="en-US"/>
+          </a:p>
+        </p:txBody>
+      </p:sp>
+      <p:sp>
+        <p:nvSpPr>
+          <p:cNvPr id="24" name="Text 21"/>
+          <p:cNvSpPr/>
+          <p:nvPr/>
+        </p:nvSpPr>
+        <p:spPr>
+          <a:xfrm>
+            <a:off x="640080" y="4343400"/>
+            <a:ext cx="3200400" cy="365760"/>
+          </a:xfrm>
+          <a:prstGeom prst="rect">
+            <a:avLst/>
+          </a:prstGeom>
+          <a:noFill/>
+          <a:ln/>
+        </p:spPr>
+        <p:txBody>
+          <a:bodyPr wrap="square" lIns="0" tIns="0" rIns="0" bIns="0" rtlCol="0" anchor="ctr"/>
+          <a:lstStyle/>
+          <a:p>
+            <a:pPr marL="0" indent="0">
+              <a:buNone/>
+            </a:pPr>
+            <a:r>
+              <a:rPr lang="en-US" sz="1200" b="1" dirty="0">
+                <a:solidFill>
+                  <a:srgbClr val="0EA5E9"/>
+                </a:solidFill>
+                <a:latin typeface="Consolas" pitchFamily="34" charset="0"/>
+                <a:ea typeface="Consolas" pitchFamily="34" charset="-122"/>
+                <a:cs typeface="Consolas" pitchFamily="34" charset="-120"/>
+              </a:rPr>
+              <a:t>shein_exploratory_diagnostics.xlsx</a:t>
+            </a:r>
+            <a:endParaRPr lang="en-US" sz="1200" dirty="0"/>
+          </a:p>
+        </p:txBody>
+      </p:sp>
+      <p:sp>
+        <p:nvSpPr>
+          <p:cNvPr id="25" name="Text 22"/>
+          <p:cNvSpPr/>
+          <p:nvPr/>
+        </p:nvSpPr>
+        <p:spPr>
+          <a:xfrm>
+            <a:off x="3931920" y="4343400"/>
+            <a:ext cx="4572000" cy="365760"/>
+          </a:xfrm>
+          <a:prstGeom prst="rect">
+            <a:avLst/>
+          </a:prstGeom>
+          <a:noFill/>
+          <a:ln/>
+        </p:spPr>
+        <p:txBody>
+          <a:bodyPr wrap="square" lIns="0" tIns="0" rIns="0" bIns="0" rtlCol="0" anchor="ctr"/>
+          <a:lstStyle/>
+          <a:p>
+            <a:pPr marL="0" indent="0">
+              <a:buNone/>
+            </a:pPr>
+            <a:r>
+              <a:rPr lang="en-US" sz="1300" dirty="0">
+                <a:solidFill>
+                  <a:srgbClr val="21295C"/>
+                </a:solidFill>
+                <a:latin typeface="Calibri" pitchFamily="34" charset="0"/>
+                <a:ea typeface="Calibri" pitchFamily="34" charset="-122"/>
+                <a:cs typeface="Calibri" pitchFamily="34" charset="-120"/>
+              </a:rPr>
+              <a:t>20-sheet diagnostics workbook (evidence base)</a:t>
+            </a:r>
+            <a:endParaRPr lang="en-US" sz="1300" dirty="0"/>
+          </a:p>
+        </p:txBody>
+      </p:sp>
+    </p:spTree>
+  </p:cSld>
+  <p:clrMapOvr>
+    <a:masterClrMapping/>
+  </p:clrMapOvr>
+</p:sld>
+</file>
+
+<file path=ppt/slides/slide11.xml><?xml version="1.0" encoding="utf-8"?>
+<p:sld xmlns:a="http://schemas.openxmlformats.org/drawingml/2006/main" xmlns:r="http://schemas.openxmlformats.org/officeDocument/2006/relationships" xmlns:p="http://schemas.openxmlformats.org/presentationml/2006/main">
   <p:cSld name="Slide 10">
     <p:bg>
       <p:bgPr>
@@ -3291,7 +4199,7 @@
 </p:sld>
 </file>
 
-<file path=ppt/slides/slide11.xml><?xml version="1.0" encoding="utf-8"?>
+<file path=ppt/slides/slide12.xml><?xml version="1.0" encoding="utf-8"?>
 <p:sld xmlns:a="http://schemas.openxmlformats.org/drawingml/2006/main" xmlns:r="http://schemas.openxmlformats.org/officeDocument/2006/relationships" xmlns:p="http://schemas.openxmlformats.org/presentationml/2006/main">
   <p:cSld name="Slide 11">
     <p:bg>
@@ -3948,7 +4856,7 @@
         </p:nvSpPr>
         <p:spPr>
           <a:xfrm>
-            <a:off x="457200" y="4023360"/>
+            <a:off x="457200" y="4091940"/>
             <a:ext cx="8229600" cy="868680"/>
           </a:xfrm>
           <a:prstGeom prst="rect">
@@ -3970,7 +4878,7 @@
           <a:bodyPr/>
           <a:lstStyle/>
           <a:p>
-            <a:endParaRPr lang="en-US"/>
+            <a:endParaRPr lang="en-US" dirty="0"/>
           </a:p>
         </p:txBody>
       </p:sp>
@@ -4034,7 +4942,7 @@
                 <a:ea typeface="Calibri" pitchFamily="34" charset="-122"/>
                 <a:cs typeface="Calibri" pitchFamily="34" charset="-120"/>
               </a:rPr>
-              <a:t>Balancing training schedule with assignment</a:t>
+              <a:t>The pipeline, report, git pushes and cleaning sizes</a:t>
             </a:r>
             <a:endParaRPr lang="en-US" sz="1400" dirty="0"/>
           </a:p>
@@ -4048,7 +4956,7 @@
         </p:nvSpPr>
         <p:spPr>
           <a:xfrm>
-            <a:off x="685800" y="4325112"/>
+            <a:off x="685800" y="4457700"/>
             <a:ext cx="7772400" cy="256032"/>
           </a:xfrm>
           <a:prstGeom prst="rect">
@@ -4073,38 +4981,12 @@
                 <a:ea typeface="Calibri" pitchFamily="34" charset="-122"/>
                 <a:cs typeface="Calibri" pitchFamily="34" charset="-120"/>
               </a:rPr>
-              <a:t>Ministry M&amp;E training and national holidays compressed available working time.</a:t>
+              <a:t>All these tasks were challenges, as I had to ask for guidance on several occasions for push in the right direction.</a:t>
             </a:r>
-            <a:endParaRPr lang="en-US" sz="1200" dirty="0"/>
-          </a:p>
-        </p:txBody>
-      </p:sp>
-      <p:sp>
-        <p:nvSpPr>
-          <p:cNvPr id="24" name="Text 21"/>
-          <p:cNvSpPr/>
-          <p:nvPr/>
-        </p:nvSpPr>
-        <p:spPr>
-          <a:xfrm>
-            <a:off x="685800" y="4599432"/>
-            <a:ext cx="7772400" cy="228600"/>
-          </a:xfrm>
-          <a:prstGeom prst="rect">
-            <a:avLst/>
-          </a:prstGeom>
-          <a:noFill/>
-          <a:ln/>
-        </p:spPr>
-        <p:txBody>
-          <a:bodyPr wrap="square" lIns="0" tIns="0" rIns="0" bIns="0" rtlCol="0" anchor="ctr"/>
-          <a:lstStyle/>
-          <a:p>
-            <a:pPr marL="0" indent="0">
-              <a:buNone/>
-            </a:pPr>
+          </a:p>
+          <a:p>
             <a:r>
-              <a:rPr lang="en-US" sz="1100" i="1" dirty="0">
+              <a:rPr lang="en-US" sz="1200" i="1" dirty="0">
                 <a:solidFill>
                   <a:srgbClr val="0EA5E9"/>
                 </a:solidFill>
@@ -4112,8 +4994,43 @@
                 <a:ea typeface="Calibri" pitchFamily="34" charset="-122"/>
                 <a:cs typeface="Calibri" pitchFamily="34" charset="-120"/>
               </a:rPr>
-              <a:t>Next time: Would build buffer days into schedule from the start.</a:t>
+              <a:t>Next time: I know how to clean larger datasets, create cleaner pipelines, README and cleaning csv scraped data.</a:t>
             </a:r>
+            <a:endParaRPr lang="en-US" sz="1200" dirty="0">
+              <a:solidFill>
+                <a:srgbClr val="64748B"/>
+              </a:solidFill>
+              <a:latin typeface="Calibri" pitchFamily="34" charset="0"/>
+              <a:ea typeface="Calibri" pitchFamily="34" charset="-122"/>
+              <a:cs typeface="Calibri" pitchFamily="34" charset="-120"/>
+            </a:endParaRPr>
+          </a:p>
+        </p:txBody>
+      </p:sp>
+      <p:sp>
+        <p:nvSpPr>
+          <p:cNvPr id="24" name="Text 21"/>
+          <p:cNvSpPr/>
+          <p:nvPr/>
+        </p:nvSpPr>
+        <p:spPr>
+          <a:xfrm>
+            <a:off x="685800" y="4599432"/>
+            <a:ext cx="7772400" cy="228600"/>
+          </a:xfrm>
+          <a:prstGeom prst="rect">
+            <a:avLst/>
+          </a:prstGeom>
+          <a:noFill/>
+          <a:ln/>
+        </p:spPr>
+        <p:txBody>
+          <a:bodyPr wrap="square" lIns="0" tIns="0" rIns="0" bIns="0" rtlCol="0" anchor="ctr"/>
+          <a:lstStyle/>
+          <a:p>
+            <a:pPr marL="0" indent="0">
+              <a:buNone/>
+            </a:pPr>
             <a:endParaRPr lang="en-US" sz="1100" dirty="0"/>
           </a:p>
         </p:txBody>
@@ -4126,7 +5043,7 @@
 </p:sld>
 </file>
 
-<file path=ppt/slides/slide12.xml><?xml version="1.0" encoding="utf-8"?>
+<file path=ppt/slides/slide13.xml><?xml version="1.0" encoding="utf-8"?>
 <p:sld xmlns:a="http://schemas.openxmlformats.org/drawingml/2006/main" xmlns:r="http://schemas.openxmlformats.org/officeDocument/2006/relationships" xmlns:p="http://schemas.openxmlformats.org/presentationml/2006/main">
   <p:cSld name="Slide 12">
     <p:bg>
@@ -4245,7 +5162,13 @@
         <p:nvGraphicFramePr>
           <p:cNvPr id="5" name="Chart 0"/>
           <p:cNvGraphicFramePr/>
-          <p:nvPr/>
+          <p:nvPr>
+            <p:extLst>
+              <p:ext uri="{D42A27DB-BD31-4B8C-83A1-F6EECF244321}">
+                <p14:modId xmlns:p14="http://schemas.microsoft.com/office/powerpoint/2010/main" val="816260906"/>
+              </p:ext>
+            </p:extLst>
+          </p:nvPr>
         </p:nvGraphicFramePr>
         <p:xfrm>
           <a:off x="457200" y="1005840"/>
@@ -4338,7 +5261,7 @@
 </p:sld>
 </file>
 
-<file path=ppt/slides/slide13.xml><?xml version="1.0" encoding="utf-8"?>
+<file path=ppt/slides/slide14.xml><?xml version="1.0" encoding="utf-8"?>
 <p:sld xmlns:a="http://schemas.openxmlformats.org/drawingml/2006/main" xmlns:r="http://schemas.openxmlformats.org/officeDocument/2006/relationships" xmlns:p="http://schemas.openxmlformats.org/presentationml/2006/main">
   <p:cSld name="Slide 13">
     <p:bg>
@@ -5156,7 +6079,7 @@
 </p:sld>
 </file>
 
-<file path=ppt/slides/slide14.xml><?xml version="1.0" encoding="utf-8"?>
+<file path=ppt/slides/slide15.xml><?xml version="1.0" encoding="utf-8"?>
 <p:sld xmlns:a="http://schemas.openxmlformats.org/drawingml/2006/main" xmlns:r="http://schemas.openxmlformats.org/officeDocument/2006/relationships" xmlns:p="http://schemas.openxmlformats.org/presentationml/2006/main">
   <p:cSld name="Slide 14">
     <p:bg>
@@ -5994,7 +6917,29 @@
                 <a:ea typeface="Calibri" pitchFamily="34" charset="-122"/>
                 <a:cs typeface="Calibri" pitchFamily="34" charset="-120"/>
               </a:rPr>
-              <a:t>url, name, sku, price,</a:t>
+              <a:t>url, name, </a:t>
+            </a:r>
+            <a:r>
+              <a:rPr lang="en-US" sz="1500" dirty="0" err="1">
+                <a:solidFill>
+                  <a:srgbClr val="21295C"/>
+                </a:solidFill>
+                <a:latin typeface="Calibri" pitchFamily="34" charset="0"/>
+                <a:ea typeface="Calibri" pitchFamily="34" charset="-122"/>
+                <a:cs typeface="Calibri" pitchFamily="34" charset="-120"/>
+              </a:rPr>
+              <a:t>sku</a:t>
+            </a:r>
+            <a:r>
+              <a:rPr lang="en-US" sz="1500" dirty="0">
+                <a:solidFill>
+                  <a:srgbClr val="21295C"/>
+                </a:solidFill>
+                <a:latin typeface="Calibri" pitchFamily="34" charset="0"/>
+                <a:ea typeface="Calibri" pitchFamily="34" charset="-122"/>
+                <a:cs typeface="Calibri" pitchFamily="34" charset="-120"/>
+              </a:rPr>
+              <a:t> (stock keeping unit), price,</a:t>
             </a:r>
             <a:endParaRPr lang="en-US" sz="1500" dirty="0"/>
           </a:p>
@@ -6134,7 +7079,7 @@
                 <a:ea typeface="Georgia" pitchFamily="34" charset="-122"/>
                 <a:cs typeface="Georgia" pitchFamily="34" charset="-120"/>
               </a:rPr>
-              <a:t>What We Set Out to Do</a:t>
+              <a:t>What I Set Out to Do</a:t>
             </a:r>
             <a:endParaRPr lang="en-US" sz="3200" dirty="0"/>
           </a:p>
@@ -6741,9 +7686,8 @@
                 <a:ea typeface="Calibri" pitchFamily="34" charset="-122"/>
                 <a:cs typeface="Calibri" pitchFamily="34" charset="-120"/>
               </a:rPr>
-              <a:t>Deduplicated URL list + count</a:t>
+              <a:t>Left as is </a:t>
             </a:r>
-            <a:endParaRPr lang="en-US" sz="1300" dirty="0"/>
           </a:p>
         </p:txBody>
       </p:sp>
@@ -8073,7 +9017,7 @@
           <a:bodyPr/>
           <a:lstStyle/>
           <a:p>
-            <a:endParaRPr lang="en-US"/>
+            <a:endParaRPr lang="en-US" dirty="0"/>
           </a:p>
         </p:txBody>
       </p:sp>
@@ -8176,7 +9120,7 @@
                 <a:ea typeface="Calibri" pitchFamily="34" charset="-122"/>
                 <a:cs typeface="Calibri" pitchFamily="34" charset="-120"/>
               </a:rPr>
-              <a:t>~50% of raw rows are exact duplicates by SKU</a:t>
+              <a:t>~7.18% of raw rows are exact duplicates by SKU, (7,987/111,189)</a:t>
             </a:r>
             <a:endParaRPr lang="en-US" sz="1200" dirty="0"/>
           </a:p>
@@ -8594,145 +9538,6 @@
                 <a:cs typeface="Calibri" pitchFamily="34" charset="-120"/>
               </a:rPr>
               <a:t>Standard, EU, shoe, bedding, kids, bra, petite, plus, jeans, etc. in one field</a:t>
-            </a:r>
-            <a:endParaRPr lang="en-US" sz="1200" dirty="0"/>
-          </a:p>
-        </p:txBody>
-      </p:sp>
-      <p:sp>
-        <p:nvSpPr>
-          <p:cNvPr id="21" name="Shape 18"/>
-          <p:cNvSpPr/>
-          <p:nvPr/>
-        </p:nvSpPr>
-        <p:spPr>
-          <a:xfrm>
-            <a:off x="457200" y="4206240"/>
-            <a:ext cx="8229600" cy="685800"/>
-          </a:xfrm>
-          <a:prstGeom prst="rect">
-            <a:avLst/>
-          </a:prstGeom>
-          <a:solidFill>
-            <a:srgbClr val="FFFFFF"/>
-          </a:solidFill>
-          <a:ln/>
-          <a:effectLst>
-            <a:outerShdw blurRad="76200" dist="25400" dir="8100000" algn="bl" rotWithShape="0">
-              <a:srgbClr val="000000">
-                <a:alpha val="12000"/>
-              </a:srgbClr>
-            </a:outerShdw>
-          </a:effectLst>
-        </p:spPr>
-        <p:txBody>
-          <a:bodyPr/>
-          <a:lstStyle/>
-          <a:p>
-            <a:endParaRPr lang="en-US"/>
-          </a:p>
-        </p:txBody>
-      </p:sp>
-      <p:sp>
-        <p:nvSpPr>
-          <p:cNvPr id="22" name="Shape 19"/>
-          <p:cNvSpPr/>
-          <p:nvPr/>
-        </p:nvSpPr>
-        <p:spPr>
-          <a:xfrm>
-            <a:off x="457200" y="4206240"/>
-            <a:ext cx="54864" cy="685800"/>
-          </a:xfrm>
-          <a:prstGeom prst="rect">
-            <a:avLst/>
-          </a:prstGeom>
-          <a:solidFill>
-            <a:srgbClr val="F59E0B"/>
-          </a:solidFill>
-          <a:ln/>
-        </p:spPr>
-        <p:txBody>
-          <a:bodyPr/>
-          <a:lstStyle/>
-          <a:p>
-            <a:endParaRPr lang="en-US"/>
-          </a:p>
-        </p:txBody>
-      </p:sp>
-      <p:sp>
-        <p:nvSpPr>
-          <p:cNvPr id="23" name="Text 20"/>
-          <p:cNvSpPr/>
-          <p:nvPr/>
-        </p:nvSpPr>
-        <p:spPr>
-          <a:xfrm>
-            <a:off x="685800" y="4251960"/>
-            <a:ext cx="7772400" cy="320040"/>
-          </a:xfrm>
-          <a:prstGeom prst="rect">
-            <a:avLst/>
-          </a:prstGeom>
-          <a:noFill/>
-          <a:ln/>
-        </p:spPr>
-        <p:txBody>
-          <a:bodyPr wrap="square" lIns="0" tIns="0" rIns="0" bIns="0" rtlCol="0" anchor="ctr"/>
-          <a:lstStyle/>
-          <a:p>
-            <a:pPr marL="0" indent="0">
-              <a:buNone/>
-            </a:pPr>
-            <a:r>
-              <a:rPr lang="en-US" sz="1400" b="1" dirty="0">
-                <a:solidFill>
-                  <a:srgbClr val="21295C"/>
-                </a:solidFill>
-                <a:latin typeface="Calibri" pitchFamily="34" charset="0"/>
-                <a:ea typeface="Calibri" pitchFamily="34" charset="-122"/>
-                <a:cs typeface="Calibri" pitchFamily="34" charset="-120"/>
-              </a:rPr>
-              <a:t>Image URLs contain duplicates within rows</a:t>
-            </a:r>
-            <a:endParaRPr lang="en-US" sz="1400" dirty="0"/>
-          </a:p>
-        </p:txBody>
-      </p:sp>
-      <p:sp>
-        <p:nvSpPr>
-          <p:cNvPr id="24" name="Text 21"/>
-          <p:cNvSpPr/>
-          <p:nvPr/>
-        </p:nvSpPr>
-        <p:spPr>
-          <a:xfrm>
-            <a:off x="685800" y="4572000"/>
-            <a:ext cx="7772400" cy="274320"/>
-          </a:xfrm>
-          <a:prstGeom prst="rect">
-            <a:avLst/>
-          </a:prstGeom>
-          <a:noFill/>
-          <a:ln/>
-        </p:spPr>
-        <p:txBody>
-          <a:bodyPr wrap="square" lIns="0" tIns="0" rIns="0" bIns="0" rtlCol="0" anchor="ctr"/>
-          <a:lstStyle/>
-          <a:p>
-            <a:pPr marL="0" indent="0">
-              <a:buNone/>
-            </a:pPr>
-            <a:r>
-              <a:rPr lang="en-US" sz="1200" dirty="0">
-                <a:solidFill>
-                  <a:srgbClr val="64748B"/>
-                </a:solidFill>
-                <a:latin typeface="Calibri" pitchFamily="34" charset="0"/>
-                <a:ea typeface="Calibri" pitchFamily="34" charset="-122"/>
-                <a:cs typeface="Calibri" pitchFamily="34" charset="-120"/>
-              </a:rPr>
-              <a:t>Repeated URLs within individual product image lists</a:t>
             </a:r>
             <a:endParaRPr lang="en-US" sz="1200" dirty="0"/>
           </a:p>
@@ -8881,7 +9686,7 @@
           <p:nvPr>
             <p:extLst>
               <p:ext uri="{D42A27DB-BD31-4B8C-83A1-F6EECF244321}">
-                <p14:modId xmlns:p14="http://schemas.microsoft.com/office/powerpoint/2010/main" val="3685793406"/>
+                <p14:modId xmlns:p14="http://schemas.microsoft.com/office/powerpoint/2010/main" val="1892655814"/>
               </p:ext>
             </p:extLst>
           </p:nvPr>
@@ -9817,7 +10622,7 @@
                           <a:ea typeface="Calibri" pitchFamily="34" charset="-122"/>
                           <a:cs typeface="Calibri" pitchFamily="34" charset="-120"/>
                         </a:rPr>
-                        <a:t>Regex extract 'Color' from description dict</a:t>
+                        <a:t>Regex extract 'Color' from description</a:t>
                       </a:r>
                       <a:endParaRPr lang="en-US" sz="1200" dirty="0">
                         <a:latin typeface="Calibri" charset="0"/>
@@ -10151,6 +10956,626 @@
 </file>
 
 <file path=ppt/slides/slide7.xml><?xml version="1.0" encoding="utf-8"?>
+<p:sld xmlns:a="http://schemas.openxmlformats.org/drawingml/2006/main" xmlns:r="http://schemas.openxmlformats.org/officeDocument/2006/relationships" xmlns:p="http://schemas.openxmlformats.org/presentationml/2006/main">
+  <p:cSld>
+    <p:bg>
+      <p:bgPr>
+        <a:solidFill>
+          <a:schemeClr val="bg1"/>
+        </a:solidFill>
+        <a:effectLst/>
+      </p:bgPr>
+    </p:bg>
+    <p:spTree>
+      <p:nvGrpSpPr>
+        <p:cNvPr id="1" name=""/>
+        <p:cNvGrpSpPr/>
+        <p:nvPr/>
+      </p:nvGrpSpPr>
+      <p:grpSpPr>
+        <a:xfrm>
+          <a:off x="0" y="0"/>
+          <a:ext cx="0" cy="0"/>
+          <a:chOff x="0" y="0"/>
+          <a:chExt cx="0" cy="0"/>
+        </a:xfrm>
+      </p:grpSpPr>
+      <p:sp>
+        <p:nvSpPr>
+          <p:cNvPr id="8" name="Rectangle 7">
+            <a:extLst>
+              <a:ext uri="{FF2B5EF4-FFF2-40B4-BE49-F238E27FC236}">
+                <a16:creationId xmlns:a16="http://schemas.microsoft.com/office/drawing/2014/main" id="{F3060C83-F051-4F0E-ABAD-AA0DFC48B218}"/>
+              </a:ext>
+              <a:ext uri="{C183D7F6-B498-43B3-948B-1728B52AA6E4}">
+                <adec:decorative xmlns:adec="http://schemas.microsoft.com/office/drawing/2017/decorative" val="1"/>
+              </a:ext>
+            </a:extLst>
+          </p:cNvPr>
+          <p:cNvSpPr>
+            <a:spLocks noGrp="1" noRot="1" noChangeAspect="1" noMove="1" noResize="1" noEditPoints="1" noAdjustHandles="1" noChangeArrowheads="1" noChangeShapeType="1" noTextEdit="1"/>
+          </p:cNvSpPr>
+          <p:nvPr>
+            <p:extLst>
+              <p:ext uri="{386F3935-93C4-4BCD-93E2-E3B085C9AB24}">
+                <p16:designElem xmlns:p16="http://schemas.microsoft.com/office/powerpoint/2015/main" val="1"/>
+              </p:ext>
+            </p:extLst>
+          </p:nvPr>
+        </p:nvSpPr>
+        <p:spPr>
+          <a:xfrm>
+            <a:off x="0" y="0"/>
+            <a:ext cx="9144000" cy="5143500"/>
+          </a:xfrm>
+          <a:prstGeom prst="rect">
+            <a:avLst/>
+          </a:prstGeom>
+          <a:solidFill>
+            <a:schemeClr val="bg1"/>
+          </a:solidFill>
+          <a:ln>
+            <a:noFill/>
+          </a:ln>
+        </p:spPr>
+        <p:style>
+          <a:lnRef idx="2">
+            <a:schemeClr val="accent1">
+              <a:shade val="50000"/>
+            </a:schemeClr>
+          </a:lnRef>
+          <a:fillRef idx="1">
+            <a:schemeClr val="accent1"/>
+          </a:fillRef>
+          <a:effectRef idx="0">
+            <a:schemeClr val="accent1"/>
+          </a:effectRef>
+          <a:fontRef idx="minor">
+            <a:schemeClr val="lt1"/>
+          </a:fontRef>
+        </p:style>
+        <p:txBody>
+          <a:bodyPr rtlCol="0" anchor="ctr"/>
+          <a:lstStyle/>
+          <a:p>
+            <a:pPr algn="ctr"/>
+            <a:endParaRPr lang="en-US" dirty="0"/>
+          </a:p>
+        </p:txBody>
+      </p:sp>
+      <p:sp>
+        <p:nvSpPr>
+          <p:cNvPr id="10" name="Freeform: Shape 9">
+            <a:extLst>
+              <a:ext uri="{FF2B5EF4-FFF2-40B4-BE49-F238E27FC236}">
+                <a16:creationId xmlns:a16="http://schemas.microsoft.com/office/drawing/2014/main" id="{83C98ABE-055B-441F-B07E-44F97F083C39}"/>
+              </a:ext>
+              <a:ext uri="{C183D7F6-B498-43B3-948B-1728B52AA6E4}">
+                <adec:decorative xmlns:adec="http://schemas.microsoft.com/office/drawing/2017/decorative" val="1"/>
+              </a:ext>
+            </a:extLst>
+          </p:cNvPr>
+          <p:cNvSpPr>
+            <a:spLocks noGrp="1" noRot="1" noChangeAspect="1" noMove="1" noResize="1" noEditPoints="1" noAdjustHandles="1" noChangeArrowheads="1" noChangeShapeType="1" noTextEdit="1"/>
+          </p:cNvSpPr>
+          <p:nvPr>
+            <p:extLst>
+              <p:ext uri="{386F3935-93C4-4BCD-93E2-E3B085C9AB24}">
+                <p16:designElem xmlns:p16="http://schemas.microsoft.com/office/powerpoint/2015/main" val="1"/>
+              </p:ext>
+            </p:extLst>
+          </p:nvPr>
+        </p:nvSpPr>
+        <p:spPr>
+          <a:xfrm rot="18900000" flipH="1">
+            <a:off x="-282117" y="-190252"/>
+            <a:ext cx="1370728" cy="1032741"/>
+          </a:xfrm>
+          <a:custGeom>
+            <a:avLst/>
+            <a:gdLst>
+              <a:gd name="connsiteX0" fmla="*/ 0 w 1827638"/>
+              <a:gd name="connsiteY0" fmla="*/ 987379 h 1376989"/>
+              <a:gd name="connsiteX1" fmla="*/ 987379 w 1827638"/>
+              <a:gd name="connsiteY1" fmla="*/ 0 h 1376989"/>
+              <a:gd name="connsiteX2" fmla="*/ 1827638 w 1827638"/>
+              <a:gd name="connsiteY2" fmla="*/ 840260 h 1376989"/>
+              <a:gd name="connsiteX3" fmla="*/ 1827638 w 1827638"/>
+              <a:gd name="connsiteY3" fmla="*/ 1376989 h 1376989"/>
+              <a:gd name="connsiteX4" fmla="*/ 0 w 1827638"/>
+              <a:gd name="connsiteY4" fmla="*/ 1376989 h 1376989"/>
+            </a:gdLst>
+            <a:ahLst/>
+            <a:cxnLst>
+              <a:cxn ang="0">
+                <a:pos x="connsiteX0" y="connsiteY0"/>
+              </a:cxn>
+              <a:cxn ang="0">
+                <a:pos x="connsiteX1" y="connsiteY1"/>
+              </a:cxn>
+              <a:cxn ang="0">
+                <a:pos x="connsiteX2" y="connsiteY2"/>
+              </a:cxn>
+              <a:cxn ang="0">
+                <a:pos x="connsiteX3" y="connsiteY3"/>
+              </a:cxn>
+              <a:cxn ang="0">
+                <a:pos x="connsiteX4" y="connsiteY4"/>
+              </a:cxn>
+            </a:cxnLst>
+            <a:rect l="l" t="t" r="r" b="b"/>
+            <a:pathLst>
+              <a:path w="1827638" h="1376989">
+                <a:moveTo>
+                  <a:pt x="0" y="987379"/>
+                </a:moveTo>
+                <a:lnTo>
+                  <a:pt x="987379" y="0"/>
+                </a:lnTo>
+                <a:lnTo>
+                  <a:pt x="1827638" y="840260"/>
+                </a:lnTo>
+                <a:lnTo>
+                  <a:pt x="1827638" y="1376989"/>
+                </a:lnTo>
+                <a:lnTo>
+                  <a:pt x="0" y="1376989"/>
+                </a:lnTo>
+                <a:close/>
+              </a:path>
+            </a:pathLst>
+          </a:custGeom>
+          <a:solidFill>
+            <a:schemeClr val="accent1">
+              <a:alpha val="30000"/>
+            </a:schemeClr>
+          </a:solidFill>
+          <a:ln>
+            <a:noFill/>
+          </a:ln>
+        </p:spPr>
+        <p:style>
+          <a:lnRef idx="2">
+            <a:schemeClr val="accent1">
+              <a:shade val="50000"/>
+            </a:schemeClr>
+          </a:lnRef>
+          <a:fillRef idx="1">
+            <a:schemeClr val="accent1"/>
+          </a:fillRef>
+          <a:effectRef idx="0">
+            <a:schemeClr val="accent1"/>
+          </a:effectRef>
+          <a:fontRef idx="minor">
+            <a:schemeClr val="lt1"/>
+          </a:fontRef>
+        </p:style>
+        <p:txBody>
+          <a:bodyPr rtlCol="0" anchor="ctr"/>
+          <a:lstStyle/>
+          <a:p>
+            <a:pPr algn="ctr"/>
+            <a:endParaRPr lang="en-US" dirty="0"/>
+          </a:p>
+        </p:txBody>
+      </p:sp>
+      <p:sp>
+        <p:nvSpPr>
+          <p:cNvPr id="12" name="Rectangle 11">
+            <a:extLst>
+              <a:ext uri="{FF2B5EF4-FFF2-40B4-BE49-F238E27FC236}">
+                <a16:creationId xmlns:a16="http://schemas.microsoft.com/office/drawing/2014/main" id="{29FDB030-9B49-4CED-8CCD-4D99382388AC}"/>
+              </a:ext>
+              <a:ext uri="{C183D7F6-B498-43B3-948B-1728B52AA6E4}">
+                <adec:decorative xmlns:adec="http://schemas.microsoft.com/office/drawing/2017/decorative" val="1"/>
+              </a:ext>
+            </a:extLst>
+          </p:cNvPr>
+          <p:cNvSpPr>
+            <a:spLocks noGrp="1" noRot="1" noChangeAspect="1" noMove="1" noResize="1" noEditPoints="1" noAdjustHandles="1" noChangeArrowheads="1" noChangeShapeType="1" noTextEdit="1"/>
+          </p:cNvSpPr>
+          <p:nvPr>
+            <p:extLst>
+              <p:ext uri="{386F3935-93C4-4BCD-93E2-E3B085C9AB24}">
+                <p16:designElem xmlns:p16="http://schemas.microsoft.com/office/powerpoint/2015/main" val="1"/>
+              </p:ext>
+            </p:extLst>
+          </p:nvPr>
+        </p:nvSpPr>
+        <p:spPr>
+          <a:xfrm rot="18900000" flipH="1">
+            <a:off x="668730" y="316609"/>
+            <a:ext cx="484026" cy="484026"/>
+          </a:xfrm>
+          <a:prstGeom prst="rect">
+            <a:avLst/>
+          </a:prstGeom>
+          <a:solidFill>
+            <a:schemeClr val="accent1">
+              <a:alpha val="30000"/>
+            </a:schemeClr>
+          </a:solidFill>
+          <a:ln>
+            <a:noFill/>
+          </a:ln>
+        </p:spPr>
+        <p:style>
+          <a:lnRef idx="2">
+            <a:schemeClr val="accent1">
+              <a:shade val="50000"/>
+            </a:schemeClr>
+          </a:lnRef>
+          <a:fillRef idx="1">
+            <a:schemeClr val="accent1"/>
+          </a:fillRef>
+          <a:effectRef idx="0">
+            <a:schemeClr val="accent1"/>
+          </a:effectRef>
+          <a:fontRef idx="minor">
+            <a:schemeClr val="lt1"/>
+          </a:fontRef>
+        </p:style>
+        <p:txBody>
+          <a:bodyPr rtlCol="0" anchor="ctr"/>
+          <a:lstStyle/>
+          <a:p>
+            <a:pPr algn="ctr"/>
+            <a:endParaRPr lang="en-US"/>
+          </a:p>
+        </p:txBody>
+      </p:sp>
+      <p:sp>
+        <p:nvSpPr>
+          <p:cNvPr id="14" name="Rectangle 13">
+            <a:extLst>
+              <a:ext uri="{FF2B5EF4-FFF2-40B4-BE49-F238E27FC236}">
+                <a16:creationId xmlns:a16="http://schemas.microsoft.com/office/drawing/2014/main" id="{3783CA14-24A1-485C-8B30-D6A5D87987AD}"/>
+              </a:ext>
+              <a:ext uri="{C183D7F6-B498-43B3-948B-1728B52AA6E4}">
+                <adec:decorative xmlns:adec="http://schemas.microsoft.com/office/drawing/2017/decorative" val="1"/>
+              </a:ext>
+            </a:extLst>
+          </p:cNvPr>
+          <p:cNvSpPr>
+            <a:spLocks noGrp="1" noRot="1" noChangeAspect="1" noMove="1" noResize="1" noEditPoints="1" noAdjustHandles="1" noChangeArrowheads="1" noChangeShapeType="1" noTextEdit="1"/>
+          </p:cNvSpPr>
+          <p:nvPr>
+            <p:extLst>
+              <p:ext uri="{386F3935-93C4-4BCD-93E2-E3B085C9AB24}">
+                <p16:designElem xmlns:p16="http://schemas.microsoft.com/office/powerpoint/2015/main" val="1"/>
+              </p:ext>
+            </p:extLst>
+          </p:nvPr>
+        </p:nvSpPr>
+        <p:spPr>
+          <a:xfrm rot="18900000" flipH="1">
+            <a:off x="7532611" y="491355"/>
+            <a:ext cx="515604" cy="515604"/>
+          </a:xfrm>
+          <a:prstGeom prst="rect">
+            <a:avLst/>
+          </a:prstGeom>
+          <a:solidFill>
+            <a:schemeClr val="accent4">
+              <a:alpha val="30000"/>
+            </a:schemeClr>
+          </a:solidFill>
+          <a:ln>
+            <a:noFill/>
+          </a:ln>
+        </p:spPr>
+        <p:style>
+          <a:lnRef idx="2">
+            <a:schemeClr val="accent1">
+              <a:shade val="50000"/>
+            </a:schemeClr>
+          </a:lnRef>
+          <a:fillRef idx="1">
+            <a:schemeClr val="accent1"/>
+          </a:fillRef>
+          <a:effectRef idx="0">
+            <a:schemeClr val="accent1"/>
+          </a:effectRef>
+          <a:fontRef idx="minor">
+            <a:schemeClr val="lt1"/>
+          </a:fontRef>
+        </p:style>
+        <p:txBody>
+          <a:bodyPr rtlCol="0" anchor="ctr"/>
+          <a:lstStyle/>
+          <a:p>
+            <a:pPr algn="ctr"/>
+            <a:endParaRPr lang="en-US"/>
+          </a:p>
+        </p:txBody>
+      </p:sp>
+      <p:sp>
+        <p:nvSpPr>
+          <p:cNvPr id="16" name="Freeform: Shape 15">
+            <a:extLst>
+              <a:ext uri="{FF2B5EF4-FFF2-40B4-BE49-F238E27FC236}">
+                <a16:creationId xmlns:a16="http://schemas.microsoft.com/office/drawing/2014/main" id="{9A97C86A-04D6-40F7-AE84-31AB43E6A846}"/>
+              </a:ext>
+              <a:ext uri="{C183D7F6-B498-43B3-948B-1728B52AA6E4}">
+                <adec:decorative xmlns:adec="http://schemas.microsoft.com/office/drawing/2017/decorative" val="1"/>
+              </a:ext>
+            </a:extLst>
+          </p:cNvPr>
+          <p:cNvSpPr>
+            <a:spLocks noGrp="1" noRot="1" noChangeAspect="1" noMove="1" noResize="1" noEditPoints="1" noAdjustHandles="1" noChangeArrowheads="1" noChangeShapeType="1" noTextEdit="1"/>
+          </p:cNvSpPr>
+          <p:nvPr>
+            <p:extLst>
+              <p:ext uri="{386F3935-93C4-4BCD-93E2-E3B085C9AB24}">
+                <p16:designElem xmlns:p16="http://schemas.microsoft.com/office/powerpoint/2015/main" val="1"/>
+              </p:ext>
+            </p:extLst>
+          </p:nvPr>
+        </p:nvSpPr>
+        <p:spPr>
+          <a:xfrm rot="10800000" flipH="1">
+            <a:off x="7017482" y="0"/>
+            <a:ext cx="2126518" cy="1110627"/>
+          </a:xfrm>
+          <a:custGeom>
+            <a:avLst/>
+            <a:gdLst>
+              <a:gd name="connsiteX0" fmla="*/ 2835357 w 2835357"/>
+              <a:gd name="connsiteY0" fmla="*/ 1480837 h 1480837"/>
+              <a:gd name="connsiteX1" fmla="*/ 0 w 2835357"/>
+              <a:gd name="connsiteY1" fmla="*/ 1480837 h 1480837"/>
+              <a:gd name="connsiteX2" fmla="*/ 1552727 w 2835357"/>
+              <a:gd name="connsiteY2" fmla="*/ 0 h 1480837"/>
+              <a:gd name="connsiteX3" fmla="*/ 2835357 w 2835357"/>
+              <a:gd name="connsiteY3" fmla="*/ 1223245 h 1480837"/>
+            </a:gdLst>
+            <a:ahLst/>
+            <a:cxnLst>
+              <a:cxn ang="0">
+                <a:pos x="connsiteX0" y="connsiteY0"/>
+              </a:cxn>
+              <a:cxn ang="0">
+                <a:pos x="connsiteX1" y="connsiteY1"/>
+              </a:cxn>
+              <a:cxn ang="0">
+                <a:pos x="connsiteX2" y="connsiteY2"/>
+              </a:cxn>
+              <a:cxn ang="0">
+                <a:pos x="connsiteX3" y="connsiteY3"/>
+              </a:cxn>
+            </a:cxnLst>
+            <a:rect l="l" t="t" r="r" b="b"/>
+            <a:pathLst>
+              <a:path w="2835357" h="1480837">
+                <a:moveTo>
+                  <a:pt x="2835357" y="1480837"/>
+                </a:moveTo>
+                <a:lnTo>
+                  <a:pt x="0" y="1480837"/>
+                </a:lnTo>
+                <a:lnTo>
+                  <a:pt x="1552727" y="0"/>
+                </a:lnTo>
+                <a:lnTo>
+                  <a:pt x="2835357" y="1223245"/>
+                </a:lnTo>
+                <a:close/>
+              </a:path>
+            </a:pathLst>
+          </a:custGeom>
+          <a:solidFill>
+            <a:schemeClr val="accent4">
+              <a:alpha val="30000"/>
+            </a:schemeClr>
+          </a:solidFill>
+          <a:ln>
+            <a:noFill/>
+          </a:ln>
+        </p:spPr>
+        <p:style>
+          <a:lnRef idx="2">
+            <a:schemeClr val="accent1">
+              <a:shade val="50000"/>
+            </a:schemeClr>
+          </a:lnRef>
+          <a:fillRef idx="1">
+            <a:schemeClr val="accent1"/>
+          </a:fillRef>
+          <a:effectRef idx="0">
+            <a:schemeClr val="accent1"/>
+          </a:effectRef>
+          <a:fontRef idx="minor">
+            <a:schemeClr val="lt1"/>
+          </a:fontRef>
+        </p:style>
+        <p:txBody>
+          <a:bodyPr wrap="square" rtlCol="0" anchor="ctr">
+            <a:noAutofit/>
+          </a:bodyPr>
+          <a:lstStyle/>
+          <a:p>
+            <a:pPr algn="ctr"/>
+            <a:endParaRPr lang="en-US" dirty="0"/>
+          </a:p>
+        </p:txBody>
+      </p:sp>
+      <p:sp>
+        <p:nvSpPr>
+          <p:cNvPr id="18" name="Isosceles Triangle 17">
+            <a:extLst>
+              <a:ext uri="{FF2B5EF4-FFF2-40B4-BE49-F238E27FC236}">
+                <a16:creationId xmlns:a16="http://schemas.microsoft.com/office/drawing/2014/main" id="{FF9F2414-84E8-453E-B1F3-389FDE8192D9}"/>
+              </a:ext>
+              <a:ext uri="{C183D7F6-B498-43B3-948B-1728B52AA6E4}">
+                <adec:decorative xmlns:adec="http://schemas.microsoft.com/office/drawing/2017/decorative" val="1"/>
+              </a:ext>
+            </a:extLst>
+          </p:cNvPr>
+          <p:cNvSpPr>
+            <a:spLocks noGrp="1" noRot="1" noChangeAspect="1" noMove="1" noResize="1" noEditPoints="1" noAdjustHandles="1" noChangeArrowheads="1" noChangeShapeType="1" noTextEdit="1"/>
+          </p:cNvSpPr>
+          <p:nvPr>
+            <p:extLst>
+              <p:ext uri="{386F3935-93C4-4BCD-93E2-E3B085C9AB24}">
+                <p16:designElem xmlns:p16="http://schemas.microsoft.com/office/powerpoint/2015/main" val="1"/>
+              </p:ext>
+            </p:extLst>
+          </p:nvPr>
+        </p:nvSpPr>
+        <p:spPr>
+          <a:xfrm flipH="1">
+            <a:off x="5982258" y="4586625"/>
+            <a:ext cx="1120884" cy="556875"/>
+          </a:xfrm>
+          <a:prstGeom prst="triangle">
+            <a:avLst/>
+          </a:prstGeom>
+          <a:solidFill>
+            <a:schemeClr val="accent1">
+              <a:alpha val="30000"/>
+            </a:schemeClr>
+          </a:solidFill>
+          <a:ln>
+            <a:noFill/>
+          </a:ln>
+        </p:spPr>
+        <p:style>
+          <a:lnRef idx="2">
+            <a:schemeClr val="accent1">
+              <a:shade val="50000"/>
+            </a:schemeClr>
+          </a:lnRef>
+          <a:fillRef idx="1">
+            <a:schemeClr val="accent1"/>
+          </a:fillRef>
+          <a:effectRef idx="0">
+            <a:schemeClr val="accent1"/>
+          </a:effectRef>
+          <a:fontRef idx="minor">
+            <a:schemeClr val="lt1"/>
+          </a:fontRef>
+        </p:style>
+        <p:txBody>
+          <a:bodyPr rtlCol="0" anchor="ctr"/>
+          <a:lstStyle/>
+          <a:p>
+            <a:pPr algn="ctr"/>
+            <a:endParaRPr lang="en-US"/>
+          </a:p>
+        </p:txBody>
+      </p:sp>
+      <p:pic>
+        <p:nvPicPr>
+          <p:cNvPr id="3" name="Picture 2">
+            <a:extLst>
+              <a:ext uri="{FF2B5EF4-FFF2-40B4-BE49-F238E27FC236}">
+                <a16:creationId xmlns:a16="http://schemas.microsoft.com/office/drawing/2014/main" id="{AA60CDE7-F930-9916-0837-1E254AA29815}"/>
+              </a:ext>
+            </a:extLst>
+          </p:cNvPr>
+          <p:cNvPicPr>
+            <a:picLocks noChangeAspect="1"/>
+          </p:cNvPicPr>
+          <p:nvPr/>
+        </p:nvPicPr>
+        <p:blipFill>
+          <a:blip r:embed="rId2"/>
+          <a:stretch>
+            <a:fillRect/>
+          </a:stretch>
+        </p:blipFill>
+        <p:spPr>
+          <a:xfrm>
+            <a:off x="482600" y="1181354"/>
+            <a:ext cx="8178799" cy="2780791"/>
+          </a:xfrm>
+          <a:prstGeom prst="rect">
+            <a:avLst/>
+          </a:prstGeom>
+          <a:ln>
+            <a:noFill/>
+          </a:ln>
+        </p:spPr>
+      </p:pic>
+      <p:sp>
+        <p:nvSpPr>
+          <p:cNvPr id="20" name="Isosceles Triangle 19">
+            <a:extLst>
+              <a:ext uri="{FF2B5EF4-FFF2-40B4-BE49-F238E27FC236}">
+                <a16:creationId xmlns:a16="http://schemas.microsoft.com/office/drawing/2014/main" id="{3ECA69A1-7536-43AC-85EF-C7106179F5ED}"/>
+              </a:ext>
+              <a:ext uri="{C183D7F6-B498-43B3-948B-1728B52AA6E4}">
+                <adec:decorative xmlns:adec="http://schemas.microsoft.com/office/drawing/2017/decorative" val="1"/>
+              </a:ext>
+            </a:extLst>
+          </p:cNvPr>
+          <p:cNvSpPr>
+            <a:spLocks noGrp="1" noRot="1" noChangeAspect="1" noMove="1" noResize="1" noEditPoints="1" noAdjustHandles="1" noChangeArrowheads="1" noChangeShapeType="1" noTextEdit="1"/>
+          </p:cNvSpPr>
+          <p:nvPr>
+            <p:extLst>
+              <p:ext uri="{386F3935-93C4-4BCD-93E2-E3B085C9AB24}">
+                <p16:designElem xmlns:p16="http://schemas.microsoft.com/office/powerpoint/2015/main" val="1"/>
+              </p:ext>
+            </p:extLst>
+          </p:nvPr>
+        </p:nvSpPr>
+        <p:spPr>
+          <a:xfrm flipH="1">
+            <a:off x="5703060" y="4839857"/>
+            <a:ext cx="611177" cy="303643"/>
+          </a:xfrm>
+          <a:prstGeom prst="triangle">
+            <a:avLst/>
+          </a:prstGeom>
+          <a:solidFill>
+            <a:schemeClr val="accent1">
+              <a:alpha val="30000"/>
+            </a:schemeClr>
+          </a:solidFill>
+          <a:ln>
+            <a:noFill/>
+          </a:ln>
+        </p:spPr>
+        <p:style>
+          <a:lnRef idx="2">
+            <a:schemeClr val="accent1">
+              <a:shade val="50000"/>
+            </a:schemeClr>
+          </a:lnRef>
+          <a:fillRef idx="1">
+            <a:schemeClr val="accent1"/>
+          </a:fillRef>
+          <a:effectRef idx="0">
+            <a:schemeClr val="accent1"/>
+          </a:effectRef>
+          <a:fontRef idx="minor">
+            <a:schemeClr val="lt1"/>
+          </a:fontRef>
+        </p:style>
+        <p:txBody>
+          <a:bodyPr rtlCol="0" anchor="ctr"/>
+          <a:lstStyle/>
+          <a:p>
+            <a:pPr algn="ctr"/>
+            <a:endParaRPr lang="en-US"/>
+          </a:p>
+        </p:txBody>
+      </p:sp>
+    </p:spTree>
+    <p:extLst>
+      <p:ext uri="{BB962C8B-B14F-4D97-AF65-F5344CB8AC3E}">
+        <p14:creationId xmlns:p14="http://schemas.microsoft.com/office/powerpoint/2010/main" val="3660168640"/>
+      </p:ext>
+    </p:extLst>
+  </p:cSld>
+  <p:clrMapOvr>
+    <a:masterClrMapping/>
+  </p:clrMapOvr>
+</p:sld>
+</file>
+
+<file path=ppt/slides/slide8.xml><?xml version="1.0" encoding="utf-8"?>
 <p:sld xmlns:a="http://schemas.openxmlformats.org/drawingml/2006/main" xmlns:r="http://schemas.openxmlformats.org/officeDocument/2006/relationships" xmlns:p="http://schemas.openxmlformats.org/presentationml/2006/main">
   <p:cSld name="Slide 7">
     <p:bg>
@@ -11441,7 +12866,7 @@
 </p:sld>
 </file>
 
-<file path=ppt/slides/slide8.xml><?xml version="1.0" encoding="utf-8"?>
+<file path=ppt/slides/slide9.xml><?xml version="1.0" encoding="utf-8"?>
 <p:sld xmlns:a="http://schemas.openxmlformats.org/drawingml/2006/main" xmlns:r="http://schemas.openxmlformats.org/officeDocument/2006/relationships" xmlns:p="http://schemas.openxmlformats.org/presentationml/2006/main">
   <p:cSld name="Slide 8">
     <p:bg>
@@ -11578,913 +13003,6 @@
           </a:graphicData>
         </a:graphic>
       </p:graphicFrame>
-    </p:spTree>
-  </p:cSld>
-  <p:clrMapOvr>
-    <a:masterClrMapping/>
-  </p:clrMapOvr>
-</p:sld>
-</file>
-
-<file path=ppt/slides/slide9.xml><?xml version="1.0" encoding="utf-8"?>
-<p:sld xmlns:a="http://schemas.openxmlformats.org/drawingml/2006/main" xmlns:r="http://schemas.openxmlformats.org/officeDocument/2006/relationships" xmlns:p="http://schemas.openxmlformats.org/presentationml/2006/main">
-  <p:cSld name="Slide 9">
-    <p:bg>
-      <p:bgPr>
-        <a:solidFill>
-          <a:srgbClr val="F0F4F8"/>
-        </a:solidFill>
-        <a:effectLst/>
-      </p:bgPr>
-    </p:bg>
-    <p:spTree>
-      <p:nvGrpSpPr>
-        <p:cNvPr id="1" name=""/>
-        <p:cNvGrpSpPr/>
-        <p:nvPr/>
-      </p:nvGrpSpPr>
-      <p:grpSpPr>
-        <a:xfrm>
-          <a:off x="0" y="0"/>
-          <a:ext cx="0" cy="0"/>
-          <a:chOff x="0" y="0"/>
-          <a:chExt cx="0" cy="0"/>
-        </a:xfrm>
-      </p:grpSpPr>
-      <p:sp>
-        <p:nvSpPr>
-          <p:cNvPr id="2" name="Shape 0"/>
-          <p:cNvSpPr/>
-          <p:nvPr/>
-        </p:nvSpPr>
-        <p:spPr>
-          <a:xfrm>
-            <a:off x="457200" y="320040"/>
-            <a:ext cx="457200" cy="457200"/>
-          </a:xfrm>
-          <a:prstGeom prst="ellipse">
-            <a:avLst/>
-          </a:prstGeom>
-          <a:solidFill>
-            <a:srgbClr val="065A82"/>
-          </a:solidFill>
-          <a:ln/>
-        </p:spPr>
-        <p:txBody>
-          <a:bodyPr/>
-          <a:lstStyle/>
-          <a:p>
-            <a:endParaRPr lang="en-US"/>
-          </a:p>
-        </p:txBody>
-      </p:sp>
-      <p:pic>
-        <p:nvPicPr>
-          <p:cNvPr id="3" name="Image 0" descr="preencoded.png"/>
-          <p:cNvPicPr>
-            <a:picLocks noChangeAspect="1"/>
-          </p:cNvPicPr>
-          <p:nvPr/>
-        </p:nvPicPr>
-        <p:blipFill>
-          <a:blip r:embed="rId3"/>
-          <a:stretch>
-            <a:fillRect/>
-          </a:stretch>
-        </p:blipFill>
-        <p:spPr>
-          <a:xfrm>
-            <a:off x="557784" y="420624"/>
-            <a:ext cx="256032" cy="256032"/>
-          </a:xfrm>
-          <a:prstGeom prst="rect">
-            <a:avLst/>
-          </a:prstGeom>
-        </p:spPr>
-      </p:pic>
-      <p:sp>
-        <p:nvSpPr>
-          <p:cNvPr id="4" name="Text 1"/>
-          <p:cNvSpPr/>
-          <p:nvPr/>
-        </p:nvSpPr>
-        <p:spPr>
-          <a:xfrm>
-            <a:off x="1051560" y="320040"/>
-            <a:ext cx="5486400" cy="457200"/>
-          </a:xfrm>
-          <a:prstGeom prst="rect">
-            <a:avLst/>
-          </a:prstGeom>
-          <a:noFill/>
-          <a:ln/>
-        </p:spPr>
-        <p:txBody>
-          <a:bodyPr wrap="square" lIns="0" tIns="0" rIns="0" bIns="0" rtlCol="0" anchor="ctr"/>
-          <a:lstStyle/>
-          <a:p>
-            <a:pPr marL="0" indent="0">
-              <a:buNone/>
-            </a:pPr>
-            <a:r>
-              <a:rPr lang="en-US" sz="3200" b="1" dirty="0">
-                <a:solidFill>
-                  <a:srgbClr val="21295C"/>
-                </a:solidFill>
-                <a:latin typeface="Georgia" pitchFamily="34" charset="0"/>
-                <a:ea typeface="Georgia" pitchFamily="34" charset="-122"/>
-                <a:cs typeface="Georgia" pitchFamily="34" charset="-120"/>
-              </a:rPr>
-              <a:t>Outputs</a:t>
-            </a:r>
-            <a:endParaRPr lang="en-US" sz="3200" dirty="0"/>
-          </a:p>
-        </p:txBody>
-      </p:sp>
-      <p:sp>
-        <p:nvSpPr>
-          <p:cNvPr id="5" name="Shape 2"/>
-          <p:cNvSpPr/>
-          <p:nvPr/>
-        </p:nvSpPr>
-        <p:spPr>
-          <a:xfrm>
-            <a:off x="457200" y="1005840"/>
-            <a:ext cx="8229600" cy="457200"/>
-          </a:xfrm>
-          <a:prstGeom prst="rect">
-            <a:avLst/>
-          </a:prstGeom>
-          <a:solidFill>
-            <a:srgbClr val="FFFFFF"/>
-          </a:solidFill>
-          <a:ln/>
-          <a:effectLst>
-            <a:outerShdw blurRad="76200" dist="25400" dir="8100000" algn="bl" rotWithShape="0">
-              <a:srgbClr val="000000">
-                <a:alpha val="12000"/>
-              </a:srgbClr>
-            </a:outerShdw>
-          </a:effectLst>
-        </p:spPr>
-        <p:txBody>
-          <a:bodyPr/>
-          <a:lstStyle/>
-          <a:p>
-            <a:endParaRPr lang="en-US"/>
-          </a:p>
-        </p:txBody>
-      </p:sp>
-      <p:sp>
-        <p:nvSpPr>
-          <p:cNvPr id="6" name="Text 3"/>
-          <p:cNvSpPr/>
-          <p:nvPr/>
-        </p:nvSpPr>
-        <p:spPr>
-          <a:xfrm>
-            <a:off x="640080" y="1051560"/>
-            <a:ext cx="3200400" cy="365760"/>
-          </a:xfrm>
-          <a:prstGeom prst="rect">
-            <a:avLst/>
-          </a:prstGeom>
-          <a:noFill/>
-          <a:ln/>
-        </p:spPr>
-        <p:txBody>
-          <a:bodyPr wrap="square" lIns="0" tIns="0" rIns="0" bIns="0" rtlCol="0" anchor="ctr"/>
-          <a:lstStyle/>
-          <a:p>
-            <a:pPr marL="0" indent="0">
-              <a:buNone/>
-            </a:pPr>
-            <a:r>
-              <a:rPr lang="en-US" sz="1200" b="1" dirty="0">
-                <a:solidFill>
-                  <a:srgbClr val="0EA5E9"/>
-                </a:solidFill>
-                <a:latin typeface="Consolas" pitchFamily="34" charset="0"/>
-                <a:ea typeface="Consolas" pitchFamily="34" charset="-122"/>
-                <a:cs typeface="Consolas" pitchFamily="34" charset="-120"/>
-              </a:rPr>
-              <a:t>shein_cleaned.csv</a:t>
-            </a:r>
-            <a:endParaRPr lang="en-US" sz="1200" dirty="0"/>
-          </a:p>
-        </p:txBody>
-      </p:sp>
-      <p:sp>
-        <p:nvSpPr>
-          <p:cNvPr id="7" name="Text 4"/>
-          <p:cNvSpPr/>
-          <p:nvPr/>
-        </p:nvSpPr>
-        <p:spPr>
-          <a:xfrm>
-            <a:off x="3931920" y="1051560"/>
-            <a:ext cx="4572000" cy="365760"/>
-          </a:xfrm>
-          <a:prstGeom prst="rect">
-            <a:avLst/>
-          </a:prstGeom>
-          <a:noFill/>
-          <a:ln/>
-        </p:spPr>
-        <p:txBody>
-          <a:bodyPr wrap="square" lIns="0" tIns="0" rIns="0" bIns="0" rtlCol="0" anchor="ctr"/>
-          <a:lstStyle/>
-          <a:p>
-            <a:pPr marL="0" indent="0">
-              <a:buNone/>
-            </a:pPr>
-            <a:r>
-              <a:rPr lang="en-US" sz="1300" dirty="0">
-                <a:solidFill>
-                  <a:srgbClr val="21295C"/>
-                </a:solidFill>
-                <a:latin typeface="Calibri" pitchFamily="34" charset="0"/>
-                <a:ea typeface="Calibri" pitchFamily="34" charset="-122"/>
-                <a:cs typeface="Calibri" pitchFamily="34" charset="-120"/>
-              </a:rPr>
-              <a:t>Primary cleaned dataset — all columns, one row per product</a:t>
-            </a:r>
-            <a:endParaRPr lang="en-US" sz="1300" dirty="0"/>
-          </a:p>
-        </p:txBody>
-      </p:sp>
-      <p:sp>
-        <p:nvSpPr>
-          <p:cNvPr id="8" name="Shape 5"/>
-          <p:cNvSpPr/>
-          <p:nvPr/>
-        </p:nvSpPr>
-        <p:spPr>
-          <a:xfrm>
-            <a:off x="457200" y="1554480"/>
-            <a:ext cx="8229600" cy="457200"/>
-          </a:xfrm>
-          <a:prstGeom prst="rect">
-            <a:avLst/>
-          </a:prstGeom>
-          <a:solidFill>
-            <a:srgbClr val="FFFFFF"/>
-          </a:solidFill>
-          <a:ln/>
-          <a:effectLst>
-            <a:outerShdw blurRad="76200" dist="25400" dir="8100000" algn="bl" rotWithShape="0">
-              <a:srgbClr val="000000">
-                <a:alpha val="12000"/>
-              </a:srgbClr>
-            </a:outerShdw>
-          </a:effectLst>
-        </p:spPr>
-        <p:txBody>
-          <a:bodyPr/>
-          <a:lstStyle/>
-          <a:p>
-            <a:endParaRPr lang="en-US"/>
-          </a:p>
-        </p:txBody>
-      </p:sp>
-      <p:sp>
-        <p:nvSpPr>
-          <p:cNvPr id="9" name="Text 6"/>
-          <p:cNvSpPr/>
-          <p:nvPr/>
-        </p:nvSpPr>
-        <p:spPr>
-          <a:xfrm>
-            <a:off x="640080" y="1600200"/>
-            <a:ext cx="3200400" cy="365760"/>
-          </a:xfrm>
-          <a:prstGeom prst="rect">
-            <a:avLst/>
-          </a:prstGeom>
-          <a:noFill/>
-          <a:ln/>
-        </p:spPr>
-        <p:txBody>
-          <a:bodyPr wrap="square" lIns="0" tIns="0" rIns="0" bIns="0" rtlCol="0" anchor="ctr"/>
-          <a:lstStyle/>
-          <a:p>
-            <a:pPr marL="0" indent="0">
-              <a:buNone/>
-            </a:pPr>
-            <a:r>
-              <a:rPr lang="en-US" sz="1200" b="1" dirty="0">
-                <a:solidFill>
-                  <a:srgbClr val="0EA5E9"/>
-                </a:solidFill>
-                <a:latin typeface="Consolas" pitchFamily="34" charset="0"/>
-                <a:ea typeface="Consolas" pitchFamily="34" charset="-122"/>
-                <a:cs typeface="Consolas" pitchFamily="34" charset="-120"/>
-              </a:rPr>
-              <a:t>shein_cleaned.sav</a:t>
-            </a:r>
-            <a:endParaRPr lang="en-US" sz="1200" dirty="0"/>
-          </a:p>
-        </p:txBody>
-      </p:sp>
-      <p:sp>
-        <p:nvSpPr>
-          <p:cNvPr id="10" name="Text 7"/>
-          <p:cNvSpPr/>
-          <p:nvPr/>
-        </p:nvSpPr>
-        <p:spPr>
-          <a:xfrm>
-            <a:off x="3931920" y="1600200"/>
-            <a:ext cx="4572000" cy="365760"/>
-          </a:xfrm>
-          <a:prstGeom prst="rect">
-            <a:avLst/>
-          </a:prstGeom>
-          <a:noFill/>
-          <a:ln/>
-        </p:spPr>
-        <p:txBody>
-          <a:bodyPr wrap="square" lIns="0" tIns="0" rIns="0" bIns="0" rtlCol="0" anchor="ctr"/>
-          <a:lstStyle/>
-          <a:p>
-            <a:pPr marL="0" indent="0">
-              <a:buNone/>
-            </a:pPr>
-            <a:r>
-              <a:rPr lang="en-US" sz="1300" dirty="0">
-                <a:solidFill>
-                  <a:srgbClr val="21295C"/>
-                </a:solidFill>
-                <a:latin typeface="Calibri" pitchFamily="34" charset="0"/>
-                <a:ea typeface="Calibri" pitchFamily="34" charset="-122"/>
-                <a:cs typeface="Calibri" pitchFamily="34" charset="-120"/>
-              </a:rPr>
-              <a:t>SPSS format for statistical software users</a:t>
-            </a:r>
-            <a:endParaRPr lang="en-US" sz="1300" dirty="0"/>
-          </a:p>
-        </p:txBody>
-      </p:sp>
-      <p:sp>
-        <p:nvSpPr>
-          <p:cNvPr id="11" name="Shape 8"/>
-          <p:cNvSpPr/>
-          <p:nvPr/>
-        </p:nvSpPr>
-        <p:spPr>
-          <a:xfrm>
-            <a:off x="457200" y="2103120"/>
-            <a:ext cx="8229600" cy="457200"/>
-          </a:xfrm>
-          <a:prstGeom prst="rect">
-            <a:avLst/>
-          </a:prstGeom>
-          <a:solidFill>
-            <a:srgbClr val="FFFFFF"/>
-          </a:solidFill>
-          <a:ln/>
-          <a:effectLst>
-            <a:outerShdw blurRad="76200" dist="25400" dir="8100000" algn="bl" rotWithShape="0">
-              <a:srgbClr val="000000">
-                <a:alpha val="12000"/>
-              </a:srgbClr>
-            </a:outerShdw>
-          </a:effectLst>
-        </p:spPr>
-        <p:txBody>
-          <a:bodyPr/>
-          <a:lstStyle/>
-          <a:p>
-            <a:endParaRPr lang="en-US"/>
-          </a:p>
-        </p:txBody>
-      </p:sp>
-      <p:sp>
-        <p:nvSpPr>
-          <p:cNvPr id="12" name="Text 9"/>
-          <p:cNvSpPr/>
-          <p:nvPr/>
-        </p:nvSpPr>
-        <p:spPr>
-          <a:xfrm>
-            <a:off x="640080" y="2148840"/>
-            <a:ext cx="3200400" cy="365760"/>
-          </a:xfrm>
-          <a:prstGeom prst="rect">
-            <a:avLst/>
-          </a:prstGeom>
-          <a:noFill/>
-          <a:ln/>
-        </p:spPr>
-        <p:txBody>
-          <a:bodyPr wrap="square" lIns="0" tIns="0" rIns="0" bIns="0" rtlCol="0" anchor="ctr"/>
-          <a:lstStyle/>
-          <a:p>
-            <a:pPr marL="0" indent="0">
-              <a:buNone/>
-            </a:pPr>
-            <a:r>
-              <a:rPr lang="en-US" sz="1200" b="1" dirty="0">
-                <a:solidFill>
-                  <a:srgbClr val="0EA5E9"/>
-                </a:solidFill>
-                <a:latin typeface="Consolas" pitchFamily="34" charset="0"/>
-                <a:ea typeface="Consolas" pitchFamily="34" charset="-122"/>
-                <a:cs typeface="Consolas" pitchFamily="34" charset="-120"/>
-              </a:rPr>
-              <a:t>shein_cleaned.dta</a:t>
-            </a:r>
-            <a:endParaRPr lang="en-US" sz="1200" dirty="0"/>
-          </a:p>
-        </p:txBody>
-      </p:sp>
-      <p:sp>
-        <p:nvSpPr>
-          <p:cNvPr id="13" name="Text 10"/>
-          <p:cNvSpPr/>
-          <p:nvPr/>
-        </p:nvSpPr>
-        <p:spPr>
-          <a:xfrm>
-            <a:off x="3931920" y="2148840"/>
-            <a:ext cx="4572000" cy="365760"/>
-          </a:xfrm>
-          <a:prstGeom prst="rect">
-            <a:avLst/>
-          </a:prstGeom>
-          <a:noFill/>
-          <a:ln/>
-        </p:spPr>
-        <p:txBody>
-          <a:bodyPr wrap="square" lIns="0" tIns="0" rIns="0" bIns="0" rtlCol="0" anchor="ctr"/>
-          <a:lstStyle/>
-          <a:p>
-            <a:pPr marL="0" indent="0">
-              <a:buNone/>
-            </a:pPr>
-            <a:r>
-              <a:rPr lang="en-US" sz="1300" dirty="0">
-                <a:solidFill>
-                  <a:srgbClr val="21295C"/>
-                </a:solidFill>
-                <a:latin typeface="Calibri" pitchFamily="34" charset="0"/>
-                <a:ea typeface="Calibri" pitchFamily="34" charset="-122"/>
-                <a:cs typeface="Calibri" pitchFamily="34" charset="-120"/>
-              </a:rPr>
-              <a:t>Stata format for econometric workflows</a:t>
-            </a:r>
-            <a:endParaRPr lang="en-US" sz="1300" dirty="0"/>
-          </a:p>
-        </p:txBody>
-      </p:sp>
-      <p:sp>
-        <p:nvSpPr>
-          <p:cNvPr id="14" name="Shape 11"/>
-          <p:cNvSpPr/>
-          <p:nvPr/>
-        </p:nvSpPr>
-        <p:spPr>
-          <a:xfrm>
-            <a:off x="457200" y="2651760"/>
-            <a:ext cx="8229600" cy="457200"/>
-          </a:xfrm>
-          <a:prstGeom prst="rect">
-            <a:avLst/>
-          </a:prstGeom>
-          <a:solidFill>
-            <a:srgbClr val="FFFFFF"/>
-          </a:solidFill>
-          <a:ln/>
-          <a:effectLst>
-            <a:outerShdw blurRad="76200" dist="25400" dir="8100000" algn="bl" rotWithShape="0">
-              <a:srgbClr val="000000">
-                <a:alpha val="12000"/>
-              </a:srgbClr>
-            </a:outerShdw>
-          </a:effectLst>
-        </p:spPr>
-        <p:txBody>
-          <a:bodyPr/>
-          <a:lstStyle/>
-          <a:p>
-            <a:endParaRPr lang="en-US"/>
-          </a:p>
-        </p:txBody>
-      </p:sp>
-      <p:sp>
-        <p:nvSpPr>
-          <p:cNvPr id="15" name="Text 12"/>
-          <p:cNvSpPr/>
-          <p:nvPr/>
-        </p:nvSpPr>
-        <p:spPr>
-          <a:xfrm>
-            <a:off x="640080" y="2697480"/>
-            <a:ext cx="3200400" cy="365760"/>
-          </a:xfrm>
-          <a:prstGeom prst="rect">
-            <a:avLst/>
-          </a:prstGeom>
-          <a:noFill/>
-          <a:ln/>
-        </p:spPr>
-        <p:txBody>
-          <a:bodyPr wrap="square" lIns="0" tIns="0" rIns="0" bIns="0" rtlCol="0" anchor="ctr"/>
-          <a:lstStyle/>
-          <a:p>
-            <a:pPr marL="0" indent="0">
-              <a:buNone/>
-            </a:pPr>
-            <a:r>
-              <a:rPr lang="en-US" sz="1200" b="1" dirty="0">
-                <a:solidFill>
-                  <a:srgbClr val="0EA5E9"/>
-                </a:solidFill>
-                <a:latin typeface="Consolas" pitchFamily="34" charset="0"/>
-                <a:ea typeface="Consolas" pitchFamily="34" charset="-122"/>
-                <a:cs typeface="Consolas" pitchFamily="34" charset="-120"/>
-              </a:rPr>
-              <a:t>shein_cleaned.xlsx</a:t>
-            </a:r>
-            <a:endParaRPr lang="en-US" sz="1200" dirty="0"/>
-          </a:p>
-        </p:txBody>
-      </p:sp>
-      <p:sp>
-        <p:nvSpPr>
-          <p:cNvPr id="16" name="Text 13"/>
-          <p:cNvSpPr/>
-          <p:nvPr/>
-        </p:nvSpPr>
-        <p:spPr>
-          <a:xfrm>
-            <a:off x="3931920" y="2697480"/>
-            <a:ext cx="4572000" cy="365760"/>
-          </a:xfrm>
-          <a:prstGeom prst="rect">
-            <a:avLst/>
-          </a:prstGeom>
-          <a:noFill/>
-          <a:ln/>
-        </p:spPr>
-        <p:txBody>
-          <a:bodyPr wrap="square" lIns="0" tIns="0" rIns="0" bIns="0" rtlCol="0" anchor="ctr"/>
-          <a:lstStyle/>
-          <a:p>
-            <a:pPr marL="0" indent="0">
-              <a:buNone/>
-            </a:pPr>
-            <a:r>
-              <a:rPr lang="en-US" sz="1300" dirty="0">
-                <a:solidFill>
-                  <a:srgbClr val="21295C"/>
-                </a:solidFill>
-                <a:latin typeface="Calibri" pitchFamily="34" charset="0"/>
-                <a:ea typeface="Calibri" pitchFamily="34" charset="-122"/>
-                <a:cs typeface="Calibri" pitchFamily="34" charset="-120"/>
-              </a:rPr>
-              <a:t>Excel workbook for non-technical stakeholders</a:t>
-            </a:r>
-            <a:endParaRPr lang="en-US" sz="1300" dirty="0"/>
-          </a:p>
-        </p:txBody>
-      </p:sp>
-      <p:sp>
-        <p:nvSpPr>
-          <p:cNvPr id="17" name="Shape 14"/>
-          <p:cNvSpPr/>
-          <p:nvPr/>
-        </p:nvSpPr>
-        <p:spPr>
-          <a:xfrm>
-            <a:off x="457200" y="3200400"/>
-            <a:ext cx="8229600" cy="457200"/>
-          </a:xfrm>
-          <a:prstGeom prst="rect">
-            <a:avLst/>
-          </a:prstGeom>
-          <a:solidFill>
-            <a:srgbClr val="FFFFFF"/>
-          </a:solidFill>
-          <a:ln/>
-          <a:effectLst>
-            <a:outerShdw blurRad="76200" dist="25400" dir="8100000" algn="bl" rotWithShape="0">
-              <a:srgbClr val="000000">
-                <a:alpha val="12000"/>
-              </a:srgbClr>
-            </a:outerShdw>
-          </a:effectLst>
-        </p:spPr>
-        <p:txBody>
-          <a:bodyPr/>
-          <a:lstStyle/>
-          <a:p>
-            <a:endParaRPr lang="en-US"/>
-          </a:p>
-        </p:txBody>
-      </p:sp>
-      <p:sp>
-        <p:nvSpPr>
-          <p:cNvPr id="18" name="Text 15"/>
-          <p:cNvSpPr/>
-          <p:nvPr/>
-        </p:nvSpPr>
-        <p:spPr>
-          <a:xfrm>
-            <a:off x="640080" y="3246120"/>
-            <a:ext cx="3200400" cy="365760"/>
-          </a:xfrm>
-          <a:prstGeom prst="rect">
-            <a:avLst/>
-          </a:prstGeom>
-          <a:noFill/>
-          <a:ln/>
-        </p:spPr>
-        <p:txBody>
-          <a:bodyPr wrap="square" lIns="0" tIns="0" rIns="0" bIns="0" rtlCol="0" anchor="ctr"/>
-          <a:lstStyle/>
-          <a:p>
-            <a:pPr marL="0" indent="0">
-              <a:buNone/>
-            </a:pPr>
-            <a:r>
-              <a:rPr lang="en-US" sz="1200" b="1" dirty="0">
-                <a:solidFill>
-                  <a:srgbClr val="0EA5E9"/>
-                </a:solidFill>
-                <a:latin typeface="Consolas" pitchFamily="34" charset="0"/>
-                <a:ea typeface="Consolas" pitchFamily="34" charset="-122"/>
-                <a:cs typeface="Consolas" pitchFamily="34" charset="-120"/>
-              </a:rPr>
-              <a:t>shein_cleaned.rds</a:t>
-            </a:r>
-            <a:endParaRPr lang="en-US" sz="1200" dirty="0"/>
-          </a:p>
-        </p:txBody>
-      </p:sp>
-      <p:sp>
-        <p:nvSpPr>
-          <p:cNvPr id="19" name="Text 16"/>
-          <p:cNvSpPr/>
-          <p:nvPr/>
-        </p:nvSpPr>
-        <p:spPr>
-          <a:xfrm>
-            <a:off x="3931920" y="3246120"/>
-            <a:ext cx="4572000" cy="365760"/>
-          </a:xfrm>
-          <a:prstGeom prst="rect">
-            <a:avLst/>
-          </a:prstGeom>
-          <a:noFill/>
-          <a:ln/>
-        </p:spPr>
-        <p:txBody>
-          <a:bodyPr wrap="square" lIns="0" tIns="0" rIns="0" bIns="0" rtlCol="0" anchor="ctr"/>
-          <a:lstStyle/>
-          <a:p>
-            <a:pPr marL="0" indent="0">
-              <a:buNone/>
-            </a:pPr>
-            <a:r>
-              <a:rPr lang="en-US" sz="1300" dirty="0">
-                <a:solidFill>
-                  <a:srgbClr val="21295C"/>
-                </a:solidFill>
-                <a:latin typeface="Calibri" pitchFamily="34" charset="0"/>
-                <a:ea typeface="Calibri" pitchFamily="34" charset="-122"/>
-                <a:cs typeface="Calibri" pitchFamily="34" charset="-120"/>
-              </a:rPr>
-              <a:t>Native R format preserving data types and factors</a:t>
-            </a:r>
-            <a:endParaRPr lang="en-US" sz="1300" dirty="0"/>
-          </a:p>
-        </p:txBody>
-      </p:sp>
-      <p:sp>
-        <p:nvSpPr>
-          <p:cNvPr id="20" name="Shape 17"/>
-          <p:cNvSpPr/>
-          <p:nvPr/>
-        </p:nvSpPr>
-        <p:spPr>
-          <a:xfrm>
-            <a:off x="457200" y="3749040"/>
-            <a:ext cx="8229600" cy="457200"/>
-          </a:xfrm>
-          <a:prstGeom prst="rect">
-            <a:avLst/>
-          </a:prstGeom>
-          <a:solidFill>
-            <a:srgbClr val="FFFFFF"/>
-          </a:solidFill>
-          <a:ln/>
-          <a:effectLst>
-            <a:outerShdw blurRad="76200" dist="25400" dir="8100000" algn="bl" rotWithShape="0">
-              <a:srgbClr val="000000">
-                <a:alpha val="12000"/>
-              </a:srgbClr>
-            </a:outerShdw>
-          </a:effectLst>
-        </p:spPr>
-        <p:txBody>
-          <a:bodyPr/>
-          <a:lstStyle/>
-          <a:p>
-            <a:endParaRPr lang="en-US"/>
-          </a:p>
-        </p:txBody>
-      </p:sp>
-      <p:sp>
-        <p:nvSpPr>
-          <p:cNvPr id="21" name="Text 18"/>
-          <p:cNvSpPr/>
-          <p:nvPr/>
-        </p:nvSpPr>
-        <p:spPr>
-          <a:xfrm>
-            <a:off x="640080" y="3794760"/>
-            <a:ext cx="3200400" cy="365760"/>
-          </a:xfrm>
-          <a:prstGeom prst="rect">
-            <a:avLst/>
-          </a:prstGeom>
-          <a:noFill/>
-          <a:ln/>
-        </p:spPr>
-        <p:txBody>
-          <a:bodyPr wrap="square" lIns="0" tIns="0" rIns="0" bIns="0" rtlCol="0" anchor="ctr"/>
-          <a:lstStyle/>
-          <a:p>
-            <a:pPr marL="0" indent="0">
-              <a:buNone/>
-            </a:pPr>
-            <a:r>
-              <a:rPr lang="en-US" sz="1200" b="1" dirty="0">
-                <a:solidFill>
-                  <a:srgbClr val="0EA5E9"/>
-                </a:solidFill>
-                <a:latin typeface="Consolas" pitchFamily="34" charset="0"/>
-                <a:ea typeface="Consolas" pitchFamily="34" charset="-122"/>
-                <a:cs typeface="Consolas" pitchFamily="34" charset="-120"/>
-              </a:rPr>
-              <a:t>shein_data_quality_report.docx</a:t>
-            </a:r>
-            <a:endParaRPr lang="en-US" sz="1200" dirty="0"/>
-          </a:p>
-        </p:txBody>
-      </p:sp>
-      <p:sp>
-        <p:nvSpPr>
-          <p:cNvPr id="22" name="Text 19"/>
-          <p:cNvSpPr/>
-          <p:nvPr/>
-        </p:nvSpPr>
-        <p:spPr>
-          <a:xfrm>
-            <a:off x="3931920" y="3794760"/>
-            <a:ext cx="4572000" cy="365760"/>
-          </a:xfrm>
-          <a:prstGeom prst="rect">
-            <a:avLst/>
-          </a:prstGeom>
-          <a:noFill/>
-          <a:ln/>
-        </p:spPr>
-        <p:txBody>
-          <a:bodyPr wrap="square" lIns="0" tIns="0" rIns="0" bIns="0" rtlCol="0" anchor="ctr"/>
-          <a:lstStyle/>
-          <a:p>
-            <a:pPr marL="0" indent="0">
-              <a:buNone/>
-            </a:pPr>
-            <a:r>
-              <a:rPr lang="en-US" sz="1300" dirty="0">
-                <a:solidFill>
-                  <a:srgbClr val="21295C"/>
-                </a:solidFill>
-                <a:latin typeface="Calibri" pitchFamily="34" charset="0"/>
-                <a:ea typeface="Calibri" pitchFamily="34" charset="-122"/>
-                <a:cs typeface="Calibri" pitchFamily="34" charset="-120"/>
-              </a:rPr>
-              <a:t>Rendered Word report documenting all decisions</a:t>
-            </a:r>
-            <a:endParaRPr lang="en-US" sz="1300" dirty="0"/>
-          </a:p>
-        </p:txBody>
-      </p:sp>
-      <p:sp>
-        <p:nvSpPr>
-          <p:cNvPr id="23" name="Shape 20"/>
-          <p:cNvSpPr/>
-          <p:nvPr/>
-        </p:nvSpPr>
-        <p:spPr>
-          <a:xfrm>
-            <a:off x="457200" y="4297680"/>
-            <a:ext cx="8229600" cy="457200"/>
-          </a:xfrm>
-          <a:prstGeom prst="rect">
-            <a:avLst/>
-          </a:prstGeom>
-          <a:solidFill>
-            <a:srgbClr val="FFFFFF"/>
-          </a:solidFill>
-          <a:ln/>
-          <a:effectLst>
-            <a:outerShdw blurRad="76200" dist="25400" dir="8100000" algn="bl" rotWithShape="0">
-              <a:srgbClr val="000000">
-                <a:alpha val="12000"/>
-              </a:srgbClr>
-            </a:outerShdw>
-          </a:effectLst>
-        </p:spPr>
-        <p:txBody>
-          <a:bodyPr/>
-          <a:lstStyle/>
-          <a:p>
-            <a:endParaRPr lang="en-US"/>
-          </a:p>
-        </p:txBody>
-      </p:sp>
-      <p:sp>
-        <p:nvSpPr>
-          <p:cNvPr id="24" name="Text 21"/>
-          <p:cNvSpPr/>
-          <p:nvPr/>
-        </p:nvSpPr>
-        <p:spPr>
-          <a:xfrm>
-            <a:off x="640080" y="4343400"/>
-            <a:ext cx="3200400" cy="365760"/>
-          </a:xfrm>
-          <a:prstGeom prst="rect">
-            <a:avLst/>
-          </a:prstGeom>
-          <a:noFill/>
-          <a:ln/>
-        </p:spPr>
-        <p:txBody>
-          <a:bodyPr wrap="square" lIns="0" tIns="0" rIns="0" bIns="0" rtlCol="0" anchor="ctr"/>
-          <a:lstStyle/>
-          <a:p>
-            <a:pPr marL="0" indent="0">
-              <a:buNone/>
-            </a:pPr>
-            <a:r>
-              <a:rPr lang="en-US" sz="1200" b="1" dirty="0">
-                <a:solidFill>
-                  <a:srgbClr val="0EA5E9"/>
-                </a:solidFill>
-                <a:latin typeface="Consolas" pitchFamily="34" charset="0"/>
-                <a:ea typeface="Consolas" pitchFamily="34" charset="-122"/>
-                <a:cs typeface="Consolas" pitchFamily="34" charset="-120"/>
-              </a:rPr>
-              <a:t>shein_exploratory_diagnostics.xlsx</a:t>
-            </a:r>
-            <a:endParaRPr lang="en-US" sz="1200" dirty="0"/>
-          </a:p>
-        </p:txBody>
-      </p:sp>
-      <p:sp>
-        <p:nvSpPr>
-          <p:cNvPr id="25" name="Text 22"/>
-          <p:cNvSpPr/>
-          <p:nvPr/>
-        </p:nvSpPr>
-        <p:spPr>
-          <a:xfrm>
-            <a:off x="3931920" y="4343400"/>
-            <a:ext cx="4572000" cy="365760"/>
-          </a:xfrm>
-          <a:prstGeom prst="rect">
-            <a:avLst/>
-          </a:prstGeom>
-          <a:noFill/>
-          <a:ln/>
-        </p:spPr>
-        <p:txBody>
-          <a:bodyPr wrap="square" lIns="0" tIns="0" rIns="0" bIns="0" rtlCol="0" anchor="ctr"/>
-          <a:lstStyle/>
-          <a:p>
-            <a:pPr marL="0" indent="0">
-              <a:buNone/>
-            </a:pPr>
-            <a:r>
-              <a:rPr lang="en-US" sz="1300" dirty="0">
-                <a:solidFill>
-                  <a:srgbClr val="21295C"/>
-                </a:solidFill>
-                <a:latin typeface="Calibri" pitchFamily="34" charset="0"/>
-                <a:ea typeface="Calibri" pitchFamily="34" charset="-122"/>
-                <a:cs typeface="Calibri" pitchFamily="34" charset="-120"/>
-              </a:rPr>
-              <a:t>20-sheet diagnostics workbook (evidence base)</a:t>
-            </a:r>
-            <a:endParaRPr lang="en-US" sz="1300" dirty="0"/>
-          </a:p>
-        </p:txBody>
-      </p:sp>
     </p:spTree>
   </p:cSld>
   <p:clrMapOvr>

--- a/SHEIN_Data_Cleaning_Presentation.pptx
+++ b/SHEIN_Data_Cleaning_Presentation.pptx
@@ -448,7 +448,14 @@
   <c:date1904 val="0"/>
   <c:lang val="en-US"/>
   <c:roundedCorners val="1"/>
-  <c:style val="2"/>
+  <mc:AlternateContent xmlns:mc="http://schemas.openxmlformats.org/markup-compatibility/2006">
+    <mc:Choice xmlns:c14="http://schemas.microsoft.com/office/drawing/2007/8/2/chart" Requires="c14">
+      <c14:style val="102"/>
+    </mc:Choice>
+    <mc:Fallback>
+      <c:style val="2"/>
+    </mc:Fallback>
+  </mc:AlternateContent>
   <c:chart>
     <c:autoTitleDeleted val="1"/>
     <c:plotArea>
@@ -499,7 +506,7 @@
                     <a:latin typeface="Arial"/>
                   </a:defRPr>
                 </a:pPr>
-                <a:endParaRPr lang="en-US"/>
+                <a:endParaRPr lang="en-GY"/>
               </a:p>
             </c:txPr>
             <c:showLegendKey val="0"/>
@@ -517,9 +524,9 @@
           </c:dLbls>
           <c:cat>
             <c:strRef>
-              <c:f>Sheet1!$A$2:$A$7</c:f>
+              <c:f>Sheet1!$A$2:$A$9</c:f>
               <c:strCache>
-                <c:ptCount val="6"/>
+                <c:ptCount val="8"/>
                 <c:pt idx="0">
                   <c:v>Repo setup &amp; LFS</c:v>
                 </c:pt>
@@ -536,41 +543,53 @@
                   <c:v>Size system classification</c:v>
                 </c:pt>
                 <c:pt idx="5">
+                  <c:v>Imputation</c:v>
+                </c:pt>
+                <c:pt idx="6">
                   <c:v>Report &amp; presentation</c:v>
+                </c:pt>
+                <c:pt idx="7">
+                  <c:v>Finalizing details</c:v>
                 </c:pt>
               </c:strCache>
             </c:strRef>
           </c:cat>
           <c:val>
             <c:numRef>
-              <c:f>Sheet1!$B$2:$B$7</c:f>
+              <c:f>Sheet1!$B$2:$B$9</c:f>
               <c:numCache>
                 <c:formatCode>General</c:formatCode>
-                <c:ptCount val="6"/>
+                <c:ptCount val="8"/>
                 <c:pt idx="0">
-                  <c:v>2</c:v>
+                  <c:v>6</c:v>
                 </c:pt>
                 <c:pt idx="1">
-                  <c:v>1.5</c:v>
+                  <c:v>4</c:v>
                 </c:pt>
                 <c:pt idx="2">
+                  <c:v>5</c:v>
+                </c:pt>
+                <c:pt idx="3">
+                  <c:v>6</c:v>
+                </c:pt>
+                <c:pt idx="4">
+                  <c:v>7</c:v>
+                </c:pt>
+                <c:pt idx="5">
                   <c:v>4</c:v>
                 </c:pt>
-                <c:pt idx="3">
-                  <c:v>3</c:v>
+                <c:pt idx="6">
+                  <c:v>8</c:v>
                 </c:pt>
-                <c:pt idx="4">
-                  <c:v>3</c:v>
-                </c:pt>
-                <c:pt idx="5">
-                  <c:v>1.5</c:v>
+                <c:pt idx="7">
+                  <c:v>6</c:v>
                 </c:pt>
               </c:numCache>
             </c:numRef>
           </c:val>
           <c:extLst>
             <c:ext xmlns:c16="http://schemas.microsoft.com/office/drawing/2014/chart" uri="{C3380CC4-5D6E-409C-BE32-E72D297353CC}">
-              <c16:uniqueId val="{00000000-1F3C-41B5-AD21-FE22E068BAB7}"/>
+              <c16:uniqueId val="{00000000-AD14-4597-9F49-ED46208A56EC}"/>
             </c:ext>
           </c:extLst>
         </c:ser>
@@ -5068,36 +5087,15 @@
           <a:chExt cx="0" cy="0"/>
         </a:xfrm>
       </p:grpSpPr>
-      <p:sp>
-        <p:nvSpPr>
-          <p:cNvPr id="2" name="Shape 0"/>
-          <p:cNvSpPr/>
-          <p:nvPr/>
-        </p:nvSpPr>
-        <p:spPr>
-          <a:xfrm>
-            <a:off x="457200" y="320040"/>
-            <a:ext cx="457200" cy="457200"/>
-          </a:xfrm>
-          <a:prstGeom prst="ellipse">
-            <a:avLst/>
-          </a:prstGeom>
-          <a:solidFill>
-            <a:srgbClr val="065A82"/>
-          </a:solidFill>
-          <a:ln/>
-        </p:spPr>
-        <p:txBody>
-          <a:bodyPr/>
-          <a:lstStyle/>
-          <a:p>
-            <a:endParaRPr lang="en-US"/>
-          </a:p>
-        </p:txBody>
-      </p:sp>
       <p:pic>
         <p:nvPicPr>
-          <p:cNvPr id="3" name="Image 0" descr="preencoded.png"/>
+          <p:cNvPr id="8" name="Image 0" descr="preencoded.png">
+            <a:extLst>
+              <a:ext uri="{FF2B5EF4-FFF2-40B4-BE49-F238E27FC236}">
+                <a16:creationId xmlns:a16="http://schemas.microsoft.com/office/drawing/2014/main" id="{8422DD41-034F-7CE3-9BFD-CFAE14E7EF45}"/>
+              </a:ext>
+            </a:extLst>
+          </p:cNvPr>
           <p:cNvPicPr>
             <a:picLocks noChangeAspect="1"/>
           </p:cNvPicPr>
@@ -5111,17 +5109,130 @@
         </p:blipFill>
         <p:spPr>
           <a:xfrm>
-            <a:off x="557784" y="420624"/>
-            <a:ext cx="256032" cy="256032"/>
+            <a:off x="457200" y="320040"/>
+            <a:ext cx="457200" cy="457200"/>
           </a:xfrm>
           <a:prstGeom prst="rect">
             <a:avLst/>
           </a:prstGeom>
         </p:spPr>
       </p:pic>
-      <p:sp>
-        <p:nvSpPr>
-          <p:cNvPr id="4" name="Text 1"/>
+      <p:graphicFrame>
+        <p:nvGraphicFramePr>
+          <p:cNvPr id="9" name="Chart 0">
+            <a:extLst>
+              <a:ext uri="{FF2B5EF4-FFF2-40B4-BE49-F238E27FC236}">
+                <a16:creationId xmlns:a16="http://schemas.microsoft.com/office/drawing/2014/main" id="{CE0E4BF9-A4E5-47A8-1A86-8309BE210A0E}"/>
+              </a:ext>
+            </a:extLst>
+          </p:cNvPr>
+          <p:cNvGraphicFramePr/>
+          <p:nvPr/>
+        </p:nvGraphicFramePr>
+        <p:xfrm>
+          <a:off x="457200" y="1005840"/>
+          <a:ext cx="8229600" cy="3200400"/>
+        </p:xfrm>
+        <a:graphic>
+          <a:graphicData uri="http://schemas.openxmlformats.org/drawingml/2006/chart">
+            <c:chart xmlns:c="http://schemas.openxmlformats.org/drawingml/2006/chart" xmlns:r="http://schemas.openxmlformats.org/officeDocument/2006/relationships" r:id="rId4"/>
+          </a:graphicData>
+        </a:graphic>
+      </p:graphicFrame>
+      <p:sp>
+        <p:nvSpPr>
+          <p:cNvPr id="10" name="Shape 2">
+            <a:extLst>
+              <a:ext uri="{FF2B5EF4-FFF2-40B4-BE49-F238E27FC236}">
+                <a16:creationId xmlns:a16="http://schemas.microsoft.com/office/drawing/2014/main" id="{20DF1412-E17B-C483-432C-CA9F425822C5}"/>
+              </a:ext>
+            </a:extLst>
+          </p:cNvPr>
+          <p:cNvSpPr/>
+          <p:nvPr/>
+        </p:nvSpPr>
+        <p:spPr>
+          <a:xfrm>
+            <a:off x="3200400" y="4389120"/>
+            <a:ext cx="2743200" cy="502920"/>
+          </a:xfrm>
+          <a:prstGeom prst="rect">
+            <a:avLst/>
+          </a:prstGeom>
+          <a:solidFill>
+            <a:srgbClr val="21295C"/>
+          </a:solidFill>
+          <a:ln/>
+          <a:effectLst>
+            <a:outerShdw blurRad="76200" dist="25400" dir="8100000" algn="bl" rotWithShape="0">
+              <a:srgbClr val="000000">
+                <a:alpha val="12000"/>
+              </a:srgbClr>
+            </a:outerShdw>
+          </a:effectLst>
+        </p:spPr>
+        <p:txBody>
+          <a:bodyPr/>
+          <a:lstStyle/>
+          <a:p>
+            <a:endParaRPr lang="en-GY"/>
+          </a:p>
+        </p:txBody>
+      </p:sp>
+      <p:sp>
+        <p:nvSpPr>
+          <p:cNvPr id="11" name="Text 3">
+            <a:extLst>
+              <a:ext uri="{FF2B5EF4-FFF2-40B4-BE49-F238E27FC236}">
+                <a16:creationId xmlns:a16="http://schemas.microsoft.com/office/drawing/2014/main" id="{741525D9-8ABF-DEDE-1081-0A2C96A2C6D8}"/>
+              </a:ext>
+            </a:extLst>
+          </p:cNvPr>
+          <p:cNvSpPr/>
+          <p:nvPr/>
+        </p:nvSpPr>
+        <p:spPr>
+          <a:xfrm>
+            <a:off x="3200400" y="4389120"/>
+            <a:ext cx="2743200" cy="502920"/>
+          </a:xfrm>
+          <a:prstGeom prst="rect">
+            <a:avLst/>
+          </a:prstGeom>
+          <a:noFill/>
+          <a:ln/>
+        </p:spPr>
+        <p:txBody>
+          <a:bodyPr wrap="square" lIns="0" tIns="0" rIns="0" bIns="0" rtlCol="0" anchor="ctr"/>
+          <a:lstStyle/>
+          <a:p>
+            <a:pPr marL="0" indent="0" algn="ctr">
+              <a:buNone/>
+            </a:pPr>
+            <a:r>
+              <a:rPr lang="en-US" sz="1800" b="1" dirty="0">
+                <a:solidFill>
+                  <a:srgbClr val="FFFFFF"/>
+                </a:solidFill>
+                <a:latin typeface="Georgia" pitchFamily="34" charset="0"/>
+                <a:ea typeface="Georgia" pitchFamily="34" charset="-122"/>
+                <a:cs typeface="Georgia" pitchFamily="34" charset="-120"/>
+              </a:rPr>
+              <a:t>Total: ~46 hours</a:t>
+            </a:r>
+            <a:endParaRPr lang="en-US" sz="1800" dirty="0"/>
+          </a:p>
+        </p:txBody>
+      </p:sp>
+      <p:sp>
+        <p:nvSpPr>
+          <p:cNvPr id="12" name="Text 1">
+            <a:extLst>
+              <a:ext uri="{FF2B5EF4-FFF2-40B4-BE49-F238E27FC236}">
+                <a16:creationId xmlns:a16="http://schemas.microsoft.com/office/drawing/2014/main" id="{322B1E12-4908-F3D3-0796-CD6AFB4462F2}"/>
+              </a:ext>
+            </a:extLst>
+          </p:cNvPr>
           <p:cNvSpPr/>
           <p:nvPr/>
         </p:nvSpPr>
@@ -5155,101 +5266,6 @@
               <a:t>Time Breakdown</a:t>
             </a:r>
             <a:endParaRPr lang="en-US" sz="3200" dirty="0"/>
-          </a:p>
-        </p:txBody>
-      </p:sp>
-      <p:graphicFrame>
-        <p:nvGraphicFramePr>
-          <p:cNvPr id="5" name="Chart 0"/>
-          <p:cNvGraphicFramePr/>
-          <p:nvPr>
-            <p:extLst>
-              <p:ext uri="{D42A27DB-BD31-4B8C-83A1-F6EECF244321}">
-                <p14:modId xmlns:p14="http://schemas.microsoft.com/office/powerpoint/2010/main" val="816260906"/>
-              </p:ext>
-            </p:extLst>
-          </p:nvPr>
-        </p:nvGraphicFramePr>
-        <p:xfrm>
-          <a:off x="457200" y="1005840"/>
-          <a:ext cx="8229600" cy="3200400"/>
-        </p:xfrm>
-        <a:graphic>
-          <a:graphicData uri="http://schemas.openxmlformats.org/drawingml/2006/chart">
-            <c:chart xmlns:c="http://schemas.openxmlformats.org/drawingml/2006/chart" xmlns:r="http://schemas.openxmlformats.org/officeDocument/2006/relationships" r:id="rId4"/>
-          </a:graphicData>
-        </a:graphic>
-      </p:graphicFrame>
-      <p:sp>
-        <p:nvSpPr>
-          <p:cNvPr id="6" name="Shape 2"/>
-          <p:cNvSpPr/>
-          <p:nvPr/>
-        </p:nvSpPr>
-        <p:spPr>
-          <a:xfrm>
-            <a:off x="3200400" y="4389120"/>
-            <a:ext cx="2743200" cy="502920"/>
-          </a:xfrm>
-          <a:prstGeom prst="rect">
-            <a:avLst/>
-          </a:prstGeom>
-          <a:solidFill>
-            <a:srgbClr val="21295C"/>
-          </a:solidFill>
-          <a:ln/>
-          <a:effectLst>
-            <a:outerShdw blurRad="76200" dist="25400" dir="8100000" algn="bl" rotWithShape="0">
-              <a:srgbClr val="000000">
-                <a:alpha val="12000"/>
-              </a:srgbClr>
-            </a:outerShdw>
-          </a:effectLst>
-        </p:spPr>
-        <p:txBody>
-          <a:bodyPr/>
-          <a:lstStyle/>
-          <a:p>
-            <a:endParaRPr lang="en-US"/>
-          </a:p>
-        </p:txBody>
-      </p:sp>
-      <p:sp>
-        <p:nvSpPr>
-          <p:cNvPr id="7" name="Text 3"/>
-          <p:cNvSpPr/>
-          <p:nvPr/>
-        </p:nvSpPr>
-        <p:spPr>
-          <a:xfrm>
-            <a:off x="3200400" y="4389120"/>
-            <a:ext cx="2743200" cy="502920"/>
-          </a:xfrm>
-          <a:prstGeom prst="rect">
-            <a:avLst/>
-          </a:prstGeom>
-          <a:noFill/>
-          <a:ln/>
-        </p:spPr>
-        <p:txBody>
-          <a:bodyPr wrap="square" lIns="0" tIns="0" rIns="0" bIns="0" rtlCol="0" anchor="ctr"/>
-          <a:lstStyle/>
-          <a:p>
-            <a:pPr marL="0" indent="0" algn="ctr">
-              <a:buNone/>
-            </a:pPr>
-            <a:r>
-              <a:rPr lang="en-US" sz="1800" b="1" dirty="0">
-                <a:solidFill>
-                  <a:srgbClr val="FFFFFF"/>
-                </a:solidFill>
-                <a:latin typeface="Georgia" pitchFamily="34" charset="0"/>
-                <a:ea typeface="Georgia" pitchFamily="34" charset="-122"/>
-                <a:cs typeface="Georgia" pitchFamily="34" charset="-120"/>
-              </a:rPr>
-              <a:t>Total: ~15 hours</a:t>
-            </a:r>
-            <a:endParaRPr lang="en-US" sz="1800" dirty="0"/>
           </a:p>
         </p:txBody>
       </p:sp>
@@ -5795,13 +5811,13 @@
       </p:sp>
       <p:sp>
         <p:nvSpPr>
-          <p:cNvPr id="17" name="Shape 14"/>
-          <p:cNvSpPr/>
-          <p:nvPr/>
-        </p:nvSpPr>
-        <p:spPr>
-          <a:xfrm>
-            <a:off x="457200" y="3337560"/>
+          <p:cNvPr id="21" name="Shape 18"/>
+          <p:cNvSpPr/>
+          <p:nvPr/>
+        </p:nvSpPr>
+        <p:spPr>
+          <a:xfrm>
+            <a:off x="457200" y="3474720"/>
             <a:ext cx="8229600" cy="685800"/>
           </a:xfrm>
           <a:prstGeom prst="rect">
@@ -5829,13 +5845,13 @@
       </p:sp>
       <p:sp>
         <p:nvSpPr>
-          <p:cNvPr id="18" name="Shape 15"/>
-          <p:cNvSpPr/>
-          <p:nvPr/>
-        </p:nvSpPr>
-        <p:spPr>
-          <a:xfrm>
-            <a:off x="457200" y="3337560"/>
+          <p:cNvPr id="22" name="Shape 19"/>
+          <p:cNvSpPr/>
+          <p:nvPr/>
+        </p:nvSpPr>
+        <p:spPr>
+          <a:xfrm>
+            <a:off x="457200" y="3474720"/>
             <a:ext cx="54864" cy="685800"/>
           </a:xfrm>
           <a:prstGeom prst="rect">
@@ -5856,152 +5872,13 @@
       </p:sp>
       <p:sp>
         <p:nvSpPr>
-          <p:cNvPr id="19" name="Text 16"/>
-          <p:cNvSpPr/>
-          <p:nvPr/>
-        </p:nvSpPr>
-        <p:spPr>
-          <a:xfrm>
-            <a:off x="685800" y="3383280"/>
-            <a:ext cx="7772400" cy="274320"/>
-          </a:xfrm>
-          <a:prstGeom prst="rect">
-            <a:avLst/>
-          </a:prstGeom>
-          <a:noFill/>
-          <a:ln/>
-        </p:spPr>
-        <p:txBody>
-          <a:bodyPr wrap="square" lIns="0" tIns="0" rIns="0" bIns="0" rtlCol="0" anchor="ctr"/>
-          <a:lstStyle/>
-          <a:p>
-            <a:pPr marL="0" indent="0">
-              <a:buNone/>
-            </a:pPr>
-            <a:r>
-              <a:rPr lang="en-US" sz="1400" b="1" dirty="0">
-                <a:solidFill>
-                  <a:srgbClr val="21295C"/>
-                </a:solidFill>
-                <a:latin typeface="Calibri" pitchFamily="34" charset="0"/>
-                <a:ea typeface="Calibri" pitchFamily="34" charset="-122"/>
-                <a:cs typeface="Calibri" pitchFamily="34" charset="-120"/>
-              </a:rPr>
-              <a:t>Reproducible master script</a:t>
-            </a:r>
-            <a:endParaRPr lang="en-US" sz="1400" dirty="0"/>
-          </a:p>
-        </p:txBody>
-      </p:sp>
-      <p:sp>
-        <p:nvSpPr>
-          <p:cNvPr id="20" name="Text 17"/>
-          <p:cNvSpPr/>
-          <p:nvPr/>
-        </p:nvSpPr>
-        <p:spPr>
-          <a:xfrm>
-            <a:off x="685800" y="3685032"/>
-            <a:ext cx="7772400" cy="274320"/>
-          </a:xfrm>
-          <a:prstGeom prst="rect">
-            <a:avLst/>
-          </a:prstGeom>
-          <a:noFill/>
-          <a:ln/>
-        </p:spPr>
-        <p:txBody>
-          <a:bodyPr wrap="square" lIns="0" tIns="0" rIns="0" bIns="0" rtlCol="0" anchor="ctr"/>
-          <a:lstStyle/>
-          <a:p>
-            <a:pPr marL="0" indent="0">
-              <a:buNone/>
-            </a:pPr>
-            <a:r>
-              <a:rPr lang="en-US" sz="1200" dirty="0">
-                <a:solidFill>
-                  <a:srgbClr val="64748B"/>
-                </a:solidFill>
-                <a:latin typeface="Calibri" pitchFamily="34" charset="0"/>
-                <a:ea typeface="Calibri" pitchFamily="34" charset="-122"/>
-                <a:cs typeface="Calibri" pitchFamily="34" charset="-120"/>
-              </a:rPr>
-              <a:t>Single run_pipeline.R that sources all scripts in order with error handling and timing.</a:t>
-            </a:r>
-            <a:endParaRPr lang="en-US" sz="1200" dirty="0"/>
-          </a:p>
-        </p:txBody>
-      </p:sp>
-      <p:sp>
-        <p:nvSpPr>
-          <p:cNvPr id="21" name="Shape 18"/>
-          <p:cNvSpPr/>
-          <p:nvPr/>
-        </p:nvSpPr>
-        <p:spPr>
-          <a:xfrm>
-            <a:off x="457200" y="4114800"/>
-            <a:ext cx="8229600" cy="685800"/>
-          </a:xfrm>
-          <a:prstGeom prst="rect">
-            <a:avLst/>
-          </a:prstGeom>
-          <a:solidFill>
-            <a:srgbClr val="FFFFFF"/>
-          </a:solidFill>
-          <a:ln/>
-          <a:effectLst>
-            <a:outerShdw blurRad="76200" dist="25400" dir="8100000" algn="bl" rotWithShape="0">
-              <a:srgbClr val="000000">
-                <a:alpha val="12000"/>
-              </a:srgbClr>
-            </a:outerShdw>
-          </a:effectLst>
-        </p:spPr>
-        <p:txBody>
-          <a:bodyPr/>
-          <a:lstStyle/>
-          <a:p>
-            <a:endParaRPr lang="en-US"/>
-          </a:p>
-        </p:txBody>
-      </p:sp>
-      <p:sp>
-        <p:nvSpPr>
-          <p:cNvPr id="22" name="Shape 19"/>
-          <p:cNvSpPr/>
-          <p:nvPr/>
-        </p:nvSpPr>
-        <p:spPr>
-          <a:xfrm>
-            <a:off x="457200" y="4114800"/>
-            <a:ext cx="54864" cy="685800"/>
-          </a:xfrm>
-          <a:prstGeom prst="rect">
-            <a:avLst/>
-          </a:prstGeom>
-          <a:solidFill>
-            <a:srgbClr val="0EA5E9"/>
-          </a:solidFill>
-          <a:ln/>
-        </p:spPr>
-        <p:txBody>
-          <a:bodyPr/>
-          <a:lstStyle/>
-          <a:p>
-            <a:endParaRPr lang="en-US"/>
-          </a:p>
-        </p:txBody>
-      </p:sp>
-      <p:sp>
-        <p:nvSpPr>
           <p:cNvPr id="23" name="Text 20"/>
           <p:cNvSpPr/>
           <p:nvPr/>
         </p:nvSpPr>
         <p:spPr>
           <a:xfrm>
-            <a:off x="685800" y="4160520"/>
+            <a:off x="685800" y="3520440"/>
             <a:ext cx="7772400" cy="274320"/>
           </a:xfrm>
           <a:prstGeom prst="rect">
@@ -6040,7 +5917,7 @@
         </p:nvSpPr>
         <p:spPr>
           <a:xfrm>
-            <a:off x="685800" y="4462272"/>
+            <a:off x="685800" y="3822192"/>
             <a:ext cx="7772400" cy="274320"/>
           </a:xfrm>
           <a:prstGeom prst="rect">
@@ -7686,7 +7563,7 @@
                 <a:ea typeface="Calibri" pitchFamily="34" charset="-122"/>
                 <a:cs typeface="Calibri" pitchFamily="34" charset="-120"/>
               </a:rPr>
-              <a:t>Left as is </a:t>
+              <a:t>Left as is, image URLs counted </a:t>
             </a:r>
           </a:p>
         </p:txBody>
@@ -9686,7 +9563,7 @@
           <p:nvPr>
             <p:extLst>
               <p:ext uri="{D42A27DB-BD31-4B8C-83A1-F6EECF244321}">
-                <p14:modId xmlns:p14="http://schemas.microsoft.com/office/powerpoint/2010/main" val="1892655814"/>
+                <p14:modId xmlns:p14="http://schemas.microsoft.com/office/powerpoint/2010/main" val="1331011422"/>
               </p:ext>
             </p:extLst>
           </p:nvPr>
@@ -10081,7 +9958,7 @@
                           <a:ea typeface="Calibri" pitchFamily="34" charset="-122"/>
                           <a:cs typeface="Calibri" pitchFamily="34" charset="-120"/>
                         </a:rPr>
-                        <a:t>Primary key; ~50% rows removed</a:t>
+                        <a:t>Primary key; 7.18% rows removed</a:t>
                       </a:r>
                       <a:endParaRPr lang="en-US" sz="1200" dirty="0">
                         <a:latin typeface="Calibri" charset="0"/>
